--- a/posts/inflation suisse/presentation_eaepe.pptx
+++ b/posts/inflation suisse/presentation_eaepe.pptx
@@ -115,6 +115,11 @@
       </a:defRPr>
     </a:lvl9pPr>
   </p:defaultTextStyle>
+  <p:extLst>
+    <p:ext uri="{EFAFB233-063F-42B5-8137-9DF3F51BA10A}">
+      <p15:sldGuideLst xmlns:p15="http://schemas.microsoft.com/office/powerpoint/2012/main"/>
+    </p:ext>
+  </p:extLst>
 </p:presentation>
 </file>
 
@@ -267,7 +272,7 @@
           <a:p>
             <a:fld id="{7987863C-FB7A-4838-98F0-5ACD1BCB1DB5}" type="datetimeFigureOut">
               <a:rPr lang="fr-CH" smtClean="0"/>
-              <a:t>09.09.2026</a:t>
+              <a:t>10.09.2026</a:t>
             </a:fld>
             <a:endParaRPr lang="fr-CH"/>
           </a:p>
@@ -467,7 +472,7 @@
           <a:p>
             <a:fld id="{7987863C-FB7A-4838-98F0-5ACD1BCB1DB5}" type="datetimeFigureOut">
               <a:rPr lang="fr-CH" smtClean="0"/>
-              <a:t>09.09.2026</a:t>
+              <a:t>10.09.2026</a:t>
             </a:fld>
             <a:endParaRPr lang="fr-CH"/>
           </a:p>
@@ -677,7 +682,7 @@
           <a:p>
             <a:fld id="{7987863C-FB7A-4838-98F0-5ACD1BCB1DB5}" type="datetimeFigureOut">
               <a:rPr lang="fr-CH" smtClean="0"/>
-              <a:t>09.09.2026</a:t>
+              <a:t>10.09.2026</a:t>
             </a:fld>
             <a:endParaRPr lang="fr-CH"/>
           </a:p>
@@ -877,7 +882,7 @@
           <a:p>
             <a:fld id="{7987863C-FB7A-4838-98F0-5ACD1BCB1DB5}" type="datetimeFigureOut">
               <a:rPr lang="fr-CH" smtClean="0"/>
-              <a:t>09.09.2026</a:t>
+              <a:t>10.09.2026</a:t>
             </a:fld>
             <a:endParaRPr lang="fr-CH"/>
           </a:p>
@@ -1153,7 +1158,7 @@
           <a:p>
             <a:fld id="{7987863C-FB7A-4838-98F0-5ACD1BCB1DB5}" type="datetimeFigureOut">
               <a:rPr lang="fr-CH" smtClean="0"/>
-              <a:t>09.09.2026</a:t>
+              <a:t>10.09.2026</a:t>
             </a:fld>
             <a:endParaRPr lang="fr-CH"/>
           </a:p>
@@ -1421,7 +1426,7 @@
           <a:p>
             <a:fld id="{7987863C-FB7A-4838-98F0-5ACD1BCB1DB5}" type="datetimeFigureOut">
               <a:rPr lang="fr-CH" smtClean="0"/>
-              <a:t>09.09.2026</a:t>
+              <a:t>10.09.2026</a:t>
             </a:fld>
             <a:endParaRPr lang="fr-CH"/>
           </a:p>
@@ -1836,7 +1841,7 @@
           <a:p>
             <a:fld id="{7987863C-FB7A-4838-98F0-5ACD1BCB1DB5}" type="datetimeFigureOut">
               <a:rPr lang="fr-CH" smtClean="0"/>
-              <a:t>09.09.2026</a:t>
+              <a:t>10.09.2026</a:t>
             </a:fld>
             <a:endParaRPr lang="fr-CH"/>
           </a:p>
@@ -1978,7 +1983,7 @@
           <a:p>
             <a:fld id="{7987863C-FB7A-4838-98F0-5ACD1BCB1DB5}" type="datetimeFigureOut">
               <a:rPr lang="fr-CH" smtClean="0"/>
-              <a:t>09.09.2026</a:t>
+              <a:t>10.09.2026</a:t>
             </a:fld>
             <a:endParaRPr lang="fr-CH"/>
           </a:p>
@@ -2091,7 +2096,7 @@
           <a:p>
             <a:fld id="{7987863C-FB7A-4838-98F0-5ACD1BCB1DB5}" type="datetimeFigureOut">
               <a:rPr lang="fr-CH" smtClean="0"/>
-              <a:t>09.09.2026</a:t>
+              <a:t>10.09.2026</a:t>
             </a:fld>
             <a:endParaRPr lang="fr-CH"/>
           </a:p>
@@ -2404,7 +2409,7 @@
           <a:p>
             <a:fld id="{7987863C-FB7A-4838-98F0-5ACD1BCB1DB5}" type="datetimeFigureOut">
               <a:rPr lang="fr-CH" smtClean="0"/>
-              <a:t>09.09.2026</a:t>
+              <a:t>10.09.2026</a:t>
             </a:fld>
             <a:endParaRPr lang="fr-CH"/>
           </a:p>
@@ -2693,7 +2698,7 @@
           <a:p>
             <a:fld id="{7987863C-FB7A-4838-98F0-5ACD1BCB1DB5}" type="datetimeFigureOut">
               <a:rPr lang="fr-CH" smtClean="0"/>
-              <a:t>09.09.2026</a:t>
+              <a:t>10.09.2026</a:t>
             </a:fld>
             <a:endParaRPr lang="fr-CH"/>
           </a:p>
@@ -2936,7 +2941,7 @@
           <a:p>
             <a:fld id="{7987863C-FB7A-4838-98F0-5ACD1BCB1DB5}" type="datetimeFigureOut">
               <a:rPr lang="fr-CH" smtClean="0"/>
-              <a:t>09.09.2026</a:t>
+              <a:t>10.09.2026</a:t>
             </a:fld>
             <a:endParaRPr lang="fr-CH"/>
           </a:p>
@@ -3377,46 +3382,9 @@
           <a:lstStyle/>
           <a:p>
             <a:r>
-              <a:rPr lang="fr-CH" dirty="0"/>
-              <a:t>Inflation in an Island of High </a:t>
-            </a:r>
-            <a:r>
-              <a:rPr lang="fr-CH" dirty="0" err="1"/>
-              <a:t>Prices</a:t>
-            </a:r>
-            <a:r>
-              <a:rPr lang="fr-CH" dirty="0"/>
-              <a:t>. The </a:t>
-            </a:r>
-            <a:r>
-              <a:rPr lang="fr-CH" dirty="0" err="1"/>
-              <a:t>Factors</a:t>
-            </a:r>
-            <a:r>
-              <a:rPr lang="fr-CH" dirty="0"/>
-              <a:t> </a:t>
-            </a:r>
-            <a:r>
-              <a:rPr lang="fr-CH" dirty="0" err="1"/>
-              <a:t>behind</a:t>
-            </a:r>
-            <a:r>
-              <a:rPr lang="fr-CH" dirty="0"/>
-              <a:t> Price </a:t>
-            </a:r>
-            <a:r>
-              <a:rPr lang="fr-CH" dirty="0" err="1"/>
-              <a:t>Stability</a:t>
-            </a:r>
-            <a:r>
-              <a:rPr lang="fr-CH" dirty="0"/>
-              <a:t> in </a:t>
-            </a:r>
-            <a:r>
-              <a:rPr lang="fr-CH" dirty="0" err="1"/>
-              <a:t>Switzerland</a:t>
-            </a:r>
-            <a:endParaRPr lang="fr-CH" dirty="0"/>
+              <a:rPr lang="en-US" noProof="0" dirty="0"/>
+              <a:t>Inflation in an Island of High Prices. The Factors behind Price Stability in Switzerland</a:t>
+            </a:r>
           </a:p>
         </p:txBody>
       </p:sp>
@@ -3442,12 +3410,18 @@
           <a:lstStyle/>
           <a:p>
             <a:r>
-              <a:rPr lang="fr-CH" dirty="0" err="1"/>
+              <a:rPr lang="en-US" noProof="0" dirty="0" err="1"/>
               <a:t>Celâl</a:t>
             </a:r>
             <a:r>
-              <a:rPr lang="fr-CH" dirty="0"/>
+              <a:rPr lang="en-US" noProof="0" dirty="0"/>
               <a:t> Güney, Michalis Nikiforos, Guillaume Dreyer</a:t>
+            </a:r>
+          </a:p>
+          <a:p>
+            <a:r>
+              <a:rPr lang="en-US" noProof="0" dirty="0"/>
+              <a:t>Department of History-Economics-Society, University of Geneva</a:t>
             </a:r>
           </a:p>
         </p:txBody>
@@ -3509,38 +3483,9 @@
           <a:lstStyle/>
           <a:p>
             <a:r>
-              <a:rPr lang="fr-CH" dirty="0"/>
-              <a:t>The socio-</a:t>
-            </a:r>
-            <a:r>
-              <a:rPr lang="fr-CH" dirty="0" err="1"/>
-              <a:t>political</a:t>
-            </a:r>
-            <a:r>
-              <a:rPr lang="fr-CH" dirty="0"/>
-              <a:t> coalition </a:t>
-            </a:r>
-            <a:r>
-              <a:rPr lang="fr-CH" dirty="0" err="1"/>
-              <a:t>behind</a:t>
-            </a:r>
-            <a:r>
-              <a:rPr lang="fr-CH" dirty="0"/>
-              <a:t> </a:t>
-            </a:r>
-            <a:r>
-              <a:rPr lang="fr-CH" dirty="0" err="1"/>
-              <a:t>price</a:t>
-            </a:r>
-            <a:r>
-              <a:rPr lang="fr-CH" dirty="0"/>
-              <a:t> </a:t>
-            </a:r>
-            <a:r>
-              <a:rPr lang="fr-CH" dirty="0" err="1"/>
-              <a:t>stability</a:t>
-            </a:r>
-            <a:endParaRPr lang="fr-CH" dirty="0"/>
+              <a:rPr lang="en-US" noProof="0" dirty="0"/>
+              <a:t>The socio-political coalition behind price stability</a:t>
+            </a:r>
           </a:p>
         </p:txBody>
       </p:sp>
@@ -3571,300 +3516,20 @@
           <a:lstStyle/>
           <a:p>
             <a:r>
-              <a:rPr lang="fr-CH" dirty="0"/>
-              <a:t>Price administration, imports control and the protection of the </a:t>
-            </a:r>
-            <a:r>
-              <a:rPr lang="fr-CH" dirty="0" err="1"/>
-              <a:t>domestic</a:t>
-            </a:r>
-            <a:r>
-              <a:rPr lang="fr-CH" dirty="0"/>
-              <a:t> </a:t>
-            </a:r>
-            <a:r>
-              <a:rPr lang="fr-CH" dirty="0" err="1"/>
-              <a:t>sectors</a:t>
-            </a:r>
-            <a:r>
-              <a:rPr lang="fr-CH" dirty="0"/>
-              <a:t> are </a:t>
-            </a:r>
-            <a:r>
-              <a:rPr lang="fr-CH" dirty="0" err="1"/>
-              <a:t>often</a:t>
-            </a:r>
-            <a:r>
-              <a:rPr lang="fr-CH" dirty="0"/>
-              <a:t> </a:t>
-            </a:r>
-            <a:r>
-              <a:rPr lang="fr-CH" dirty="0" err="1"/>
-              <a:t>pointed</a:t>
-            </a:r>
-            <a:r>
-              <a:rPr lang="fr-CH" dirty="0"/>
-              <a:t> out in </a:t>
-            </a:r>
-            <a:r>
-              <a:rPr lang="fr-CH" dirty="0" err="1"/>
-              <a:t>Switzerland</a:t>
-            </a:r>
-            <a:r>
-              <a:rPr lang="fr-CH" dirty="0"/>
-              <a:t> as </a:t>
-            </a:r>
-            <a:r>
-              <a:rPr lang="fr-CH" dirty="0" err="1"/>
-              <a:t>responsible</a:t>
-            </a:r>
-            <a:r>
-              <a:rPr lang="fr-CH" dirty="0"/>
-              <a:t> for the </a:t>
-            </a:r>
-            <a:r>
-              <a:rPr lang="fr-CH" dirty="0" err="1"/>
-              <a:t>country's</a:t>
-            </a:r>
-            <a:r>
-              <a:rPr lang="fr-CH" dirty="0"/>
-              <a:t> </a:t>
-            </a:r>
-            <a:r>
-              <a:rPr lang="fr-CH" dirty="0" err="1"/>
-              <a:t>price</a:t>
-            </a:r>
-            <a:r>
-              <a:rPr lang="fr-CH" dirty="0"/>
-              <a:t> </a:t>
-            </a:r>
-            <a:r>
-              <a:rPr lang="fr-CH" dirty="0" err="1"/>
-              <a:t>stability</a:t>
-            </a:r>
-            <a:r>
-              <a:rPr lang="fr-CH" dirty="0"/>
-              <a:t>, but at the </a:t>
-            </a:r>
-            <a:r>
-              <a:rPr lang="fr-CH" dirty="0" err="1"/>
-              <a:t>expense</a:t>
-            </a:r>
-            <a:r>
-              <a:rPr lang="fr-CH" dirty="0"/>
-              <a:t> of a </a:t>
-            </a:r>
-            <a:r>
-              <a:rPr lang="fr-CH" dirty="0" err="1"/>
-              <a:t>very</a:t>
-            </a:r>
-            <a:r>
-              <a:rPr lang="fr-CH" dirty="0"/>
-              <a:t> high </a:t>
-            </a:r>
-            <a:r>
-              <a:rPr lang="fr-CH" dirty="0" err="1"/>
-              <a:t>price</a:t>
-            </a:r>
-            <a:r>
-              <a:rPr lang="fr-CH" dirty="0"/>
-              <a:t> </a:t>
-            </a:r>
-            <a:r>
-              <a:rPr lang="fr-CH" dirty="0" err="1"/>
-              <a:t>level</a:t>
-            </a:r>
-            <a:r>
-              <a:rPr lang="fr-CH" dirty="0"/>
-              <a:t>.</a:t>
-            </a:r>
-          </a:p>
-          <a:p>
-            <a:r>
-              <a:rPr lang="fr-CH" dirty="0"/>
-              <a:t>In the Swiss </a:t>
-            </a:r>
-            <a:r>
-              <a:rPr lang="fr-CH" dirty="0" err="1"/>
-              <a:t>political</a:t>
-            </a:r>
-            <a:r>
-              <a:rPr lang="fr-CH" dirty="0"/>
-              <a:t> </a:t>
-            </a:r>
-            <a:r>
-              <a:rPr lang="fr-CH" dirty="0" err="1"/>
-              <a:t>economy</a:t>
-            </a:r>
-            <a:r>
-              <a:rPr lang="fr-CH" dirty="0"/>
-              <a:t> </a:t>
-            </a:r>
-            <a:r>
-              <a:rPr lang="fr-CH" dirty="0" err="1"/>
-              <a:t>literature</a:t>
-            </a:r>
-            <a:r>
-              <a:rPr lang="fr-CH" dirty="0"/>
-              <a:t>, </a:t>
-            </a:r>
-            <a:r>
-              <a:rPr lang="fr-CH" dirty="0" err="1"/>
-              <a:t>these</a:t>
-            </a:r>
-            <a:r>
-              <a:rPr lang="fr-CH" dirty="0"/>
-              <a:t> </a:t>
-            </a:r>
-            <a:r>
-              <a:rPr lang="fr-CH" dirty="0" err="1"/>
-              <a:t>regulations</a:t>
-            </a:r>
-            <a:r>
-              <a:rPr lang="fr-CH" dirty="0"/>
-              <a:t> are </a:t>
-            </a:r>
-            <a:r>
-              <a:rPr lang="fr-CH" dirty="0" err="1"/>
-              <a:t>analyzed</a:t>
-            </a:r>
-            <a:r>
-              <a:rPr lang="fr-CH" dirty="0"/>
-              <a:t> as the </a:t>
-            </a:r>
-            <a:r>
-              <a:rPr lang="fr-CH" dirty="0" err="1"/>
-              <a:t>result</a:t>
-            </a:r>
-            <a:r>
-              <a:rPr lang="fr-CH" dirty="0"/>
-              <a:t> of a compromise </a:t>
-            </a:r>
-            <a:r>
-              <a:rPr lang="fr-CH" dirty="0" err="1"/>
-              <a:t>within</a:t>
-            </a:r>
-            <a:r>
-              <a:rPr lang="fr-CH" dirty="0"/>
-              <a:t> a "bourgeois bloc" </a:t>
-            </a:r>
-            <a:r>
-              <a:rPr lang="fr-CH" dirty="0" err="1"/>
-              <a:t>composed</a:t>
-            </a:r>
-            <a:r>
-              <a:rPr lang="fr-CH" dirty="0"/>
-              <a:t> by the </a:t>
-            </a:r>
-            <a:r>
-              <a:rPr lang="fr-CH" dirty="0" err="1"/>
-              <a:t>governing</a:t>
-            </a:r>
-            <a:r>
-              <a:rPr lang="fr-CH" dirty="0"/>
-              <a:t> right-</a:t>
-            </a:r>
-            <a:r>
-              <a:rPr lang="fr-CH" dirty="0" err="1"/>
-              <a:t>wing</a:t>
-            </a:r>
-            <a:r>
-              <a:rPr lang="fr-CH" dirty="0"/>
-              <a:t> </a:t>
-            </a:r>
-            <a:r>
-              <a:rPr lang="fr-CH" dirty="0" err="1"/>
-              <a:t>political</a:t>
-            </a:r>
-            <a:r>
-              <a:rPr lang="fr-CH" dirty="0"/>
-              <a:t> parties and the business </a:t>
-            </a:r>
-            <a:r>
-              <a:rPr lang="fr-CH" dirty="0" err="1"/>
-              <a:t>interests</a:t>
-            </a:r>
-            <a:r>
-              <a:rPr lang="fr-CH" dirty="0"/>
-              <a:t> associations (BIAs) of the export-</a:t>
-            </a:r>
-            <a:r>
-              <a:rPr lang="fr-CH" dirty="0" err="1"/>
-              <a:t>oriented</a:t>
-            </a:r>
-            <a:r>
-              <a:rPr lang="fr-CH" dirty="0"/>
-              <a:t> and </a:t>
-            </a:r>
-            <a:r>
-              <a:rPr lang="fr-CH" dirty="0" err="1"/>
-              <a:t>domestic-oriented</a:t>
-            </a:r>
-            <a:r>
-              <a:rPr lang="fr-CH" dirty="0"/>
-              <a:t> industries.</a:t>
-            </a:r>
-          </a:p>
-          <a:p>
-            <a:r>
-              <a:rPr lang="fr-CH" dirty="0"/>
-              <a:t>The compromise </a:t>
-            </a:r>
-            <a:r>
-              <a:rPr lang="fr-CH" dirty="0" err="1"/>
-              <a:t>is</a:t>
-            </a:r>
-            <a:r>
-              <a:rPr lang="fr-CH" dirty="0"/>
-              <a:t> </a:t>
-            </a:r>
-            <a:r>
-              <a:rPr lang="fr-CH" dirty="0" err="1"/>
-              <a:t>based</a:t>
-            </a:r>
-            <a:r>
-              <a:rPr lang="fr-CH" dirty="0"/>
-              <a:t> on the </a:t>
-            </a:r>
-            <a:r>
-              <a:rPr lang="fr-CH" dirty="0" err="1"/>
-              <a:t>principle</a:t>
-            </a:r>
-            <a:r>
-              <a:rPr lang="fr-CH" dirty="0"/>
-              <a:t> of "</a:t>
-            </a:r>
-            <a:r>
-              <a:rPr lang="fr-CH" dirty="0" err="1"/>
-              <a:t>external</a:t>
-            </a:r>
-            <a:r>
-              <a:rPr lang="fr-CH" dirty="0"/>
-              <a:t> </a:t>
-            </a:r>
-            <a:r>
-              <a:rPr lang="fr-CH" dirty="0" err="1"/>
-              <a:t>liberalization</a:t>
-            </a:r>
-            <a:r>
-              <a:rPr lang="fr-CH" dirty="0"/>
-              <a:t> </a:t>
-            </a:r>
-            <a:r>
-              <a:rPr lang="fr-CH" dirty="0" err="1"/>
-              <a:t>with</a:t>
-            </a:r>
-            <a:r>
-              <a:rPr lang="fr-CH" dirty="0"/>
-              <a:t> </a:t>
-            </a:r>
-            <a:r>
-              <a:rPr lang="fr-CH" dirty="0" err="1"/>
-              <a:t>domestic</a:t>
-            </a:r>
-            <a:r>
-              <a:rPr lang="fr-CH" dirty="0"/>
-              <a:t> compensation"</a:t>
+              <a:rPr lang="en-US" noProof="0" dirty="0"/>
+              <a:t>Price administration, imports control and the protection of the domestic sectors are often pointed out in Switzerland as responsible for the country's price stability, but at the expense of a very high price level.</a:t>
+            </a:r>
+          </a:p>
+          <a:p>
+            <a:r>
+              <a:rPr lang="en-US" noProof="0" dirty="0"/>
+              <a:t>In the Swiss political economy literature, these regulations are analyzed as the result of a compromise within a "bourgeois bloc" composed by the governing right-wing political parties and the business interest associations (BIAs) of the export-oriented and domestic-oriented industries.</a:t>
+            </a:r>
+          </a:p>
+          <a:p>
+            <a:r>
+              <a:rPr lang="en-US" noProof="0" dirty="0"/>
+              <a:t>The compromise is based on the principle of "external liberalization with domestic compensation"</a:t>
             </a:r>
           </a:p>
         </p:txBody>
@@ -3921,22 +3586,9 @@
           <a:lstStyle/>
           <a:p>
             <a:r>
-              <a:rPr lang="fr-CH" dirty="0"/>
-              <a:t>The bourgeois bloc narrative on the Swiss high </a:t>
-            </a:r>
-            <a:r>
-              <a:rPr lang="fr-CH" dirty="0" err="1"/>
-              <a:t>price</a:t>
-            </a:r>
-            <a:r>
-              <a:rPr lang="fr-CH" dirty="0"/>
-              <a:t> </a:t>
-            </a:r>
-            <a:r>
-              <a:rPr lang="fr-CH" dirty="0" err="1"/>
-              <a:t>island</a:t>
-            </a:r>
-            <a:endParaRPr lang="fr-CH" dirty="0"/>
+              <a:rPr lang="en-US" noProof="0" dirty="0"/>
+              <a:t>The bourgeois bloc narrative on the Swiss high price island</a:t>
+            </a:r>
           </a:p>
         </p:txBody>
       </p:sp>
@@ -3962,333 +3614,15 @@
           <a:lstStyle/>
           <a:p>
             <a:r>
-              <a:rPr lang="fr-CH" dirty="0"/>
-              <a:t>Price </a:t>
-            </a:r>
-            <a:r>
-              <a:rPr lang="fr-CH" dirty="0" err="1"/>
-              <a:t>stability</a:t>
-            </a:r>
-            <a:r>
-              <a:rPr lang="fr-CH" dirty="0"/>
-              <a:t> at the </a:t>
-            </a:r>
-            <a:r>
-              <a:rPr lang="fr-CH" dirty="0" err="1"/>
-              <a:t>expense</a:t>
-            </a:r>
-            <a:r>
-              <a:rPr lang="fr-CH" dirty="0"/>
-              <a:t> of a high </a:t>
-            </a:r>
-            <a:r>
-              <a:rPr lang="fr-CH" dirty="0" err="1"/>
-              <a:t>price</a:t>
-            </a:r>
-            <a:r>
-              <a:rPr lang="fr-CH" dirty="0"/>
-              <a:t> </a:t>
-            </a:r>
-            <a:r>
-              <a:rPr lang="fr-CH" dirty="0" err="1"/>
-              <a:t>level</a:t>
-            </a:r>
-            <a:r>
-              <a:rPr lang="fr-CH" dirty="0"/>
-              <a:t> </a:t>
-            </a:r>
-            <a:r>
-              <a:rPr lang="fr-CH" dirty="0" err="1"/>
-              <a:t>comes</a:t>
-            </a:r>
-            <a:r>
-              <a:rPr lang="fr-CH" dirty="0"/>
-              <a:t> </a:t>
-            </a:r>
-            <a:r>
-              <a:rPr lang="fr-CH" dirty="0" err="1"/>
-              <a:t>from</a:t>
-            </a:r>
-            <a:r>
-              <a:rPr lang="fr-CH" dirty="0"/>
-              <a:t> the </a:t>
-            </a:r>
-            <a:r>
-              <a:rPr lang="fr-CH" dirty="0" err="1"/>
-              <a:t>domestic</a:t>
-            </a:r>
-            <a:r>
-              <a:rPr lang="fr-CH" dirty="0"/>
-              <a:t> compensation </a:t>
-            </a:r>
-            <a:r>
-              <a:rPr lang="fr-CH" dirty="0" err="1"/>
-              <a:t>measures</a:t>
-            </a:r>
-            <a:r>
-              <a:rPr lang="fr-CH" dirty="0"/>
-              <a:t> </a:t>
-            </a:r>
-            <a:r>
-              <a:rPr lang="fr-CH" dirty="0" err="1"/>
-              <a:t>implemented</a:t>
-            </a:r>
-            <a:r>
-              <a:rPr lang="fr-CH" dirty="0"/>
-              <a:t> by the bourgeois bloc to </a:t>
-            </a:r>
-            <a:r>
-              <a:rPr lang="fr-CH" dirty="0" err="1"/>
-              <a:t>draw</a:t>
-            </a:r>
-            <a:r>
-              <a:rPr lang="fr-CH" dirty="0"/>
-              <a:t> the support </a:t>
-            </a:r>
-            <a:r>
-              <a:rPr lang="fr-CH" dirty="0" err="1"/>
-              <a:t>from</a:t>
-            </a:r>
-            <a:r>
-              <a:rPr lang="fr-CH" dirty="0"/>
-              <a:t> </a:t>
-            </a:r>
-            <a:r>
-              <a:rPr lang="fr-CH" dirty="0" err="1"/>
-              <a:t>domestic-oriented</a:t>
-            </a:r>
-            <a:r>
-              <a:rPr lang="fr-CH" dirty="0"/>
-              <a:t> industries </a:t>
-            </a:r>
-            <a:r>
-              <a:rPr lang="fr-CH" dirty="0" err="1"/>
-              <a:t>which</a:t>
-            </a:r>
-            <a:r>
-              <a:rPr lang="fr-CH" dirty="0"/>
-              <a:t> are </a:t>
-            </a:r>
-            <a:r>
-              <a:rPr lang="fr-CH" dirty="0" err="1"/>
-              <a:t>less</a:t>
-            </a:r>
-            <a:r>
-              <a:rPr lang="fr-CH" dirty="0"/>
-              <a:t> </a:t>
-            </a:r>
-            <a:r>
-              <a:rPr lang="fr-CH" dirty="0" err="1"/>
-              <a:t>competitive</a:t>
-            </a:r>
-            <a:r>
-              <a:rPr lang="fr-CH" dirty="0"/>
-              <a:t> </a:t>
-            </a:r>
-            <a:r>
-              <a:rPr lang="fr-CH" dirty="0" err="1"/>
-              <a:t>than</a:t>
-            </a:r>
-            <a:r>
-              <a:rPr lang="fr-CH" dirty="0"/>
-              <a:t> the </a:t>
-            </a:r>
-            <a:r>
-              <a:rPr lang="fr-CH" dirty="0" err="1"/>
-              <a:t>firms</a:t>
-            </a:r>
-            <a:r>
-              <a:rPr lang="fr-CH" dirty="0"/>
-              <a:t> </a:t>
-            </a:r>
-            <a:r>
-              <a:rPr lang="fr-CH" dirty="0" err="1"/>
-              <a:t>oriented</a:t>
-            </a:r>
-            <a:r>
-              <a:rPr lang="fr-CH" dirty="0"/>
-              <a:t> </a:t>
-            </a:r>
-            <a:r>
-              <a:rPr lang="fr-CH" dirty="0" err="1"/>
-              <a:t>towards</a:t>
-            </a:r>
-            <a:r>
-              <a:rPr lang="fr-CH" dirty="0"/>
-              <a:t> international </a:t>
-            </a:r>
-            <a:r>
-              <a:rPr lang="fr-CH" dirty="0" err="1"/>
-              <a:t>markets</a:t>
-            </a:r>
-            <a:endParaRPr lang="fr-CH" dirty="0"/>
-          </a:p>
-          <a:p>
-            <a:r>
-              <a:rPr lang="fr-CH" dirty="0" err="1"/>
-              <a:t>However</a:t>
-            </a:r>
-            <a:r>
-              <a:rPr lang="fr-CH" dirty="0"/>
-              <a:t>, </a:t>
-            </a:r>
-            <a:r>
-              <a:rPr lang="fr-CH" dirty="0" err="1"/>
-              <a:t>does</a:t>
-            </a:r>
-            <a:r>
-              <a:rPr lang="fr-CH" dirty="0"/>
-              <a:t> the Swiss high </a:t>
-            </a:r>
-            <a:r>
-              <a:rPr lang="fr-CH" dirty="0" err="1"/>
-              <a:t>price</a:t>
-            </a:r>
-            <a:r>
-              <a:rPr lang="fr-CH" dirty="0"/>
-              <a:t> </a:t>
-            </a:r>
-            <a:r>
-              <a:rPr lang="fr-CH" dirty="0" err="1"/>
-              <a:t>level</a:t>
-            </a:r>
-            <a:r>
-              <a:rPr lang="fr-CH" dirty="0"/>
-              <a:t> </a:t>
-            </a:r>
-            <a:r>
-              <a:rPr lang="fr-CH" dirty="0" err="1"/>
-              <a:t>really</a:t>
-            </a:r>
-            <a:r>
-              <a:rPr lang="fr-CH" dirty="0"/>
-              <a:t> come </a:t>
-            </a:r>
-            <a:r>
-              <a:rPr lang="fr-CH" dirty="0" err="1"/>
-              <a:t>from</a:t>
-            </a:r>
-            <a:r>
-              <a:rPr lang="fr-CH" dirty="0"/>
-              <a:t> </a:t>
-            </a:r>
-            <a:r>
-              <a:rPr lang="fr-CH" dirty="0" err="1"/>
-              <a:t>these</a:t>
-            </a:r>
-            <a:r>
-              <a:rPr lang="fr-CH" dirty="0"/>
-              <a:t> </a:t>
-            </a:r>
-            <a:r>
-              <a:rPr lang="fr-CH" dirty="0" err="1"/>
-              <a:t>regulations</a:t>
-            </a:r>
-            <a:r>
-              <a:rPr lang="fr-CH" dirty="0"/>
-              <a:t> ? Sax and Weder (2009) for instance </a:t>
-            </a:r>
-            <a:r>
-              <a:rPr lang="fr-CH" dirty="0" err="1"/>
-              <a:t>argued</a:t>
-            </a:r>
-            <a:r>
-              <a:rPr lang="fr-CH" dirty="0"/>
-              <a:t> </a:t>
-            </a:r>
-            <a:r>
-              <a:rPr lang="fr-CH" dirty="0" err="1"/>
-              <a:t>that</a:t>
-            </a:r>
-            <a:r>
-              <a:rPr lang="fr-CH" dirty="0"/>
-              <a:t> </a:t>
-            </a:r>
-            <a:r>
-              <a:rPr lang="fr-CH" dirty="0" err="1"/>
-              <a:t>other</a:t>
-            </a:r>
-            <a:r>
-              <a:rPr lang="fr-CH" dirty="0"/>
-              <a:t> </a:t>
-            </a:r>
-            <a:r>
-              <a:rPr lang="fr-CH" dirty="0" err="1"/>
-              <a:t>factors</a:t>
-            </a:r>
-            <a:r>
-              <a:rPr lang="fr-CH" dirty="0"/>
-              <a:t> </a:t>
-            </a:r>
-            <a:r>
-              <a:rPr lang="fr-CH" dirty="0" err="1"/>
-              <a:t>such</a:t>
-            </a:r>
-            <a:r>
-              <a:rPr lang="fr-CH" dirty="0"/>
-              <a:t> as the </a:t>
-            </a:r>
-            <a:r>
-              <a:rPr lang="fr-CH" dirty="0" err="1"/>
-              <a:t>improvement</a:t>
-            </a:r>
-            <a:r>
-              <a:rPr lang="fr-CH" dirty="0"/>
-              <a:t> in the Swiss </a:t>
-            </a:r>
-            <a:r>
-              <a:rPr lang="fr-CH" dirty="0" err="1"/>
-              <a:t>terms</a:t>
-            </a:r>
-            <a:r>
-              <a:rPr lang="fr-CH" dirty="0"/>
-              <a:t> of </a:t>
-            </a:r>
-            <a:r>
-              <a:rPr lang="fr-CH" dirty="0" err="1"/>
-              <a:t>trade</a:t>
-            </a:r>
-            <a:r>
-              <a:rPr lang="fr-CH" dirty="0"/>
-              <a:t> (</a:t>
-            </a:r>
-            <a:r>
-              <a:rPr lang="fr-CH" dirty="0" err="1"/>
-              <a:t>ie</a:t>
-            </a:r>
-            <a:r>
-              <a:rPr lang="fr-CH" dirty="0"/>
-              <a:t> the </a:t>
-            </a:r>
-            <a:r>
-              <a:rPr lang="fr-CH" dirty="0" err="1"/>
-              <a:t>success</a:t>
-            </a:r>
-            <a:r>
-              <a:rPr lang="fr-CH" dirty="0"/>
-              <a:t> of </a:t>
-            </a:r>
-            <a:r>
-              <a:rPr lang="fr-CH" dirty="0" err="1"/>
-              <a:t>its</a:t>
-            </a:r>
-            <a:r>
-              <a:rPr lang="fr-CH" dirty="0"/>
-              <a:t> exports) are a </a:t>
-            </a:r>
-            <a:r>
-              <a:rPr lang="fr-CH" dirty="0" err="1"/>
-              <a:t>better</a:t>
-            </a:r>
-            <a:r>
-              <a:rPr lang="fr-CH" dirty="0"/>
-              <a:t> </a:t>
-            </a:r>
-            <a:r>
-              <a:rPr lang="fr-CH" dirty="0" err="1"/>
-              <a:t>explanation</a:t>
-            </a:r>
-            <a:endParaRPr lang="fr-CH" dirty="0"/>
+              <a:rPr lang="en-US" noProof="0" dirty="0"/>
+              <a:t>Price stability at the expense of a high price level comes from the domestic compensation measures implemented by the bourgeois bloc to draw the support from domestic-oriented industries which are less competitive than the firms oriented towards international markets</a:t>
+            </a:r>
+          </a:p>
+          <a:p>
+            <a:r>
+              <a:rPr lang="en-US" noProof="0" dirty="0"/>
+              <a:t>However, does the Swiss high price level really come from these regulations ? Sax and Weder (2009) for instance argued that other factors such as the improvements in the Swiss terms of trade (i.e. the success of its exports) are a better explanation</a:t>
+            </a:r>
           </a:p>
         </p:txBody>
       </p:sp>
@@ -4344,7 +3678,7 @@
           <a:lstStyle/>
           <a:p>
             <a:r>
-              <a:rPr lang="fr-CH" dirty="0"/>
+              <a:rPr lang="en-US" noProof="0" dirty="0"/>
               <a:t>Conclusion</a:t>
             </a:r>
           </a:p>
@@ -4369,440 +3703,51 @@
         <p:spPr/>
         <p:txBody>
           <a:bodyPr>
-            <a:normAutofit lnSpcReduction="10000"/>
+            <a:normAutofit fontScale="92500" lnSpcReduction="20000"/>
           </a:bodyPr>
           <a:lstStyle/>
           <a:p>
             <a:r>
-              <a:rPr lang="fr-CH" dirty="0"/>
-              <a:t>Price administration </a:t>
-            </a:r>
-            <a:r>
-              <a:rPr lang="fr-CH" dirty="0" err="1"/>
-              <a:t>does</a:t>
-            </a:r>
-            <a:r>
-              <a:rPr lang="fr-CH" dirty="0"/>
-              <a:t> </a:t>
-            </a:r>
-            <a:r>
-              <a:rPr lang="fr-CH" dirty="0" err="1"/>
-              <a:t>play</a:t>
-            </a:r>
-            <a:r>
-              <a:rPr lang="fr-CH" dirty="0"/>
-              <a:t> a </a:t>
-            </a:r>
-            <a:r>
-              <a:rPr lang="fr-CH" dirty="0" err="1"/>
-              <a:t>role</a:t>
-            </a:r>
-            <a:r>
-              <a:rPr lang="fr-CH" dirty="0"/>
-              <a:t> for </a:t>
-            </a:r>
-            <a:r>
-              <a:rPr lang="fr-CH" dirty="0" err="1"/>
-              <a:t>price</a:t>
-            </a:r>
-            <a:r>
-              <a:rPr lang="fr-CH" dirty="0"/>
-              <a:t> </a:t>
-            </a:r>
-            <a:r>
-              <a:rPr lang="fr-CH" dirty="0" err="1"/>
-              <a:t>stability</a:t>
-            </a:r>
-            <a:r>
-              <a:rPr lang="fr-CH" dirty="0"/>
-              <a:t> due to </a:t>
-            </a:r>
-            <a:r>
-              <a:rPr lang="fr-CH" dirty="0" err="1"/>
-              <a:t>their</a:t>
-            </a:r>
-            <a:r>
-              <a:rPr lang="fr-CH" dirty="0"/>
-              <a:t> </a:t>
-            </a:r>
-            <a:r>
-              <a:rPr lang="fr-CH" dirty="0" err="1"/>
-              <a:t>prevalence</a:t>
-            </a:r>
-            <a:r>
-              <a:rPr lang="fr-CH" dirty="0"/>
-              <a:t> in </a:t>
-            </a:r>
-            <a:r>
-              <a:rPr lang="fr-CH" dirty="0" err="1"/>
-              <a:t>sectors</a:t>
-            </a:r>
-            <a:r>
-              <a:rPr lang="fr-CH" dirty="0"/>
-              <a:t> </a:t>
-            </a:r>
-            <a:r>
-              <a:rPr lang="fr-CH" dirty="0" err="1"/>
-              <a:t>with</a:t>
-            </a:r>
-            <a:r>
-              <a:rPr lang="fr-CH" dirty="0"/>
-              <a:t> </a:t>
-            </a:r>
-            <a:r>
-              <a:rPr lang="fr-CH" dirty="0" err="1"/>
-              <a:t>systemically</a:t>
-            </a:r>
-            <a:r>
-              <a:rPr lang="fr-CH" dirty="0"/>
-              <a:t> </a:t>
-            </a:r>
-            <a:r>
-              <a:rPr lang="fr-CH" dirty="0" err="1"/>
-              <a:t>significant</a:t>
-            </a:r>
-            <a:r>
-              <a:rPr lang="fr-CH" dirty="0"/>
-              <a:t> </a:t>
-            </a:r>
-            <a:r>
-              <a:rPr lang="fr-CH" dirty="0" err="1"/>
-              <a:t>prices</a:t>
-            </a:r>
-            <a:endParaRPr lang="fr-CH" dirty="0"/>
-          </a:p>
-          <a:p>
-            <a:r>
-              <a:rPr lang="fr-CH" dirty="0" err="1"/>
-              <a:t>However</a:t>
-            </a:r>
-            <a:r>
-              <a:rPr lang="fr-CH" dirty="0"/>
-              <a:t>, </a:t>
-            </a:r>
-            <a:r>
-              <a:rPr lang="fr-CH" dirty="0" err="1"/>
-              <a:t>other</a:t>
-            </a:r>
-            <a:r>
-              <a:rPr lang="fr-CH" dirty="0"/>
-              <a:t> </a:t>
-            </a:r>
-            <a:r>
-              <a:rPr lang="fr-CH" dirty="0" err="1"/>
-              <a:t>factors</a:t>
-            </a:r>
-            <a:r>
-              <a:rPr lang="fr-CH" dirty="0"/>
-              <a:t> </a:t>
-            </a:r>
-            <a:r>
-              <a:rPr lang="fr-CH" dirty="0" err="1"/>
-              <a:t>such</a:t>
-            </a:r>
-            <a:r>
-              <a:rPr lang="fr-CH" dirty="0"/>
-              <a:t> as </a:t>
-            </a:r>
-            <a:r>
-              <a:rPr lang="fr-CH" dirty="0" err="1"/>
-              <a:t>Switzerland's</a:t>
-            </a:r>
-            <a:r>
-              <a:rPr lang="fr-CH" dirty="0"/>
-              <a:t> </a:t>
-            </a:r>
-            <a:r>
-              <a:rPr lang="fr-CH" dirty="0" err="1"/>
-              <a:t>low</a:t>
-            </a:r>
-            <a:r>
-              <a:rPr lang="fr-CH" dirty="0"/>
-              <a:t> </a:t>
-            </a:r>
-            <a:r>
-              <a:rPr lang="fr-CH" dirty="0" err="1"/>
-              <a:t>energy</a:t>
-            </a:r>
-            <a:r>
-              <a:rPr lang="fr-CH" dirty="0"/>
-              <a:t> </a:t>
-            </a:r>
-            <a:r>
-              <a:rPr lang="fr-CH" dirty="0" err="1"/>
-              <a:t>intensity</a:t>
-            </a:r>
-            <a:r>
-              <a:rPr lang="fr-CH" dirty="0"/>
-              <a:t>, </a:t>
-            </a:r>
-            <a:r>
-              <a:rPr lang="fr-CH" dirty="0" err="1"/>
-              <a:t>which</a:t>
-            </a:r>
-            <a:r>
-              <a:rPr lang="fr-CH" dirty="0"/>
-              <a:t> has </a:t>
-            </a:r>
-            <a:r>
-              <a:rPr lang="fr-CH" dirty="0" err="1"/>
-              <a:t>improved</a:t>
-            </a:r>
-            <a:r>
-              <a:rPr lang="fr-CH" dirty="0"/>
-              <a:t> in the last </a:t>
-            </a:r>
-            <a:r>
-              <a:rPr lang="fr-CH" dirty="0" err="1"/>
-              <a:t>decades</a:t>
-            </a:r>
-            <a:r>
-              <a:rPr lang="fr-CH" dirty="0"/>
-              <a:t> due to favorable structural change, </a:t>
-            </a:r>
-            <a:r>
-              <a:rPr lang="fr-CH" dirty="0" err="1"/>
-              <a:t>also</a:t>
-            </a:r>
-            <a:r>
-              <a:rPr lang="fr-CH" dirty="0"/>
-              <a:t> </a:t>
-            </a:r>
-            <a:r>
-              <a:rPr lang="fr-CH" dirty="0" err="1"/>
-              <a:t>plays</a:t>
-            </a:r>
-            <a:r>
-              <a:rPr lang="fr-CH" dirty="0"/>
-              <a:t> an important </a:t>
-            </a:r>
-            <a:r>
-              <a:rPr lang="fr-CH" dirty="0" err="1"/>
-              <a:t>role</a:t>
-            </a:r>
-            <a:r>
-              <a:rPr lang="fr-CH" dirty="0"/>
-              <a:t>.</a:t>
-            </a:r>
-          </a:p>
-          <a:p>
-            <a:r>
-              <a:rPr lang="fr-CH" dirty="0" err="1"/>
-              <a:t>Further</a:t>
-            </a:r>
-            <a:r>
-              <a:rPr lang="fr-CH" dirty="0"/>
-              <a:t> </a:t>
-            </a:r>
-            <a:r>
-              <a:rPr lang="fr-CH" dirty="0" err="1"/>
-              <a:t>enhancements</a:t>
-            </a:r>
-            <a:r>
-              <a:rPr lang="fr-CH" dirty="0"/>
-              <a:t> of the </a:t>
-            </a:r>
-            <a:r>
-              <a:rPr lang="fr-CH" dirty="0" err="1"/>
-              <a:t>paper</a:t>
-            </a:r>
-            <a:endParaRPr lang="fr-CH" dirty="0"/>
+              <a:rPr lang="en-US" noProof="0" dirty="0"/>
+              <a:t>Price administration does play a role for price stability due to their prevalence in sectors with systemically significant prices</a:t>
+            </a:r>
+          </a:p>
+          <a:p>
+            <a:r>
+              <a:rPr lang="en-US" noProof="0" dirty="0"/>
+              <a:t>However, other factors such as Switzerland's low energy intensity, which has improved in the last decades due to favorable structural change, also plays an important role.</a:t>
+            </a:r>
+          </a:p>
+          <a:p>
+            <a:r>
+              <a:rPr lang="en-US" noProof="0" dirty="0"/>
+              <a:t>Further enhancements of the paper</a:t>
+            </a:r>
           </a:p>
           <a:p>
             <a:pPr lvl="1"/>
             <a:r>
-              <a:rPr lang="fr-CH" dirty="0"/>
-              <a:t>More </a:t>
-            </a:r>
-            <a:r>
-              <a:rPr lang="fr-CH" dirty="0" err="1"/>
-              <a:t>research</a:t>
-            </a:r>
-            <a:r>
-              <a:rPr lang="fr-CH" dirty="0"/>
-              <a:t> </a:t>
-            </a:r>
-            <a:r>
-              <a:rPr lang="fr-CH" dirty="0" err="1"/>
-              <a:t>is</a:t>
-            </a:r>
-            <a:r>
-              <a:rPr lang="fr-CH" dirty="0"/>
-              <a:t> </a:t>
-            </a:r>
-            <a:r>
-              <a:rPr lang="fr-CH" dirty="0" err="1"/>
-              <a:t>needed</a:t>
-            </a:r>
-            <a:r>
-              <a:rPr lang="fr-CH" dirty="0"/>
-              <a:t> on the </a:t>
-            </a:r>
-            <a:r>
-              <a:rPr lang="fr-CH" dirty="0" err="1"/>
-              <a:t>origins</a:t>
-            </a:r>
-            <a:r>
-              <a:rPr lang="fr-CH" dirty="0"/>
-              <a:t> of </a:t>
-            </a:r>
-            <a:r>
-              <a:rPr lang="fr-CH" dirty="0" err="1"/>
-              <a:t>Switzerland's</a:t>
-            </a:r>
-            <a:r>
-              <a:rPr lang="fr-CH" dirty="0"/>
-              <a:t> high </a:t>
-            </a:r>
-            <a:r>
-              <a:rPr lang="fr-CH" dirty="0" err="1"/>
-              <a:t>price</a:t>
-            </a:r>
-            <a:r>
-              <a:rPr lang="fr-CH" dirty="0"/>
-              <a:t> </a:t>
-            </a:r>
-            <a:r>
-              <a:rPr lang="fr-CH" dirty="0" err="1"/>
-              <a:t>level</a:t>
-            </a:r>
-            <a:r>
-              <a:rPr lang="fr-CH" dirty="0"/>
-              <a:t>, </a:t>
-            </a:r>
-            <a:r>
-              <a:rPr lang="fr-CH" dirty="0" err="1"/>
-              <a:t>beyond</a:t>
-            </a:r>
-            <a:r>
-              <a:rPr lang="fr-CH" dirty="0"/>
-              <a:t> the dominant </a:t>
-            </a:r>
-            <a:r>
-              <a:rPr lang="fr-CH" dirty="0" err="1"/>
-              <a:t>explanation</a:t>
-            </a:r>
-            <a:r>
-              <a:rPr lang="fr-CH" dirty="0"/>
-              <a:t> </a:t>
-            </a:r>
-            <a:r>
-              <a:rPr lang="fr-CH" dirty="0" err="1"/>
-              <a:t>based</a:t>
-            </a:r>
-            <a:r>
-              <a:rPr lang="fr-CH" dirty="0"/>
-              <a:t> on the high </a:t>
-            </a:r>
-            <a:r>
-              <a:rPr lang="fr-CH" dirty="0" err="1"/>
-              <a:t>degree</a:t>
-            </a:r>
-            <a:r>
-              <a:rPr lang="fr-CH" dirty="0"/>
-              <a:t> of </a:t>
-            </a:r>
-            <a:r>
-              <a:rPr lang="fr-CH" dirty="0" err="1"/>
-              <a:t>regulation</a:t>
-            </a:r>
-            <a:r>
-              <a:rPr lang="fr-CH" dirty="0"/>
-              <a:t> of the </a:t>
-            </a:r>
-            <a:r>
-              <a:rPr lang="fr-CH" dirty="0" err="1"/>
-              <a:t>domestic</a:t>
-            </a:r>
-            <a:r>
-              <a:rPr lang="fr-CH" dirty="0"/>
-              <a:t> </a:t>
-            </a:r>
-            <a:r>
-              <a:rPr lang="fr-CH" dirty="0" err="1"/>
-              <a:t>sector</a:t>
-            </a:r>
-            <a:endParaRPr lang="fr-CH" dirty="0"/>
+              <a:rPr lang="en-US" noProof="0" dirty="0"/>
+              <a:t>More research is needed on the origins of Switzerland's high price level, beyond the dominant explanation based on the high degree of regulation of the domestic sector</a:t>
+            </a:r>
           </a:p>
           <a:p>
             <a:pPr lvl="1"/>
             <a:r>
-              <a:rPr lang="fr-CH" dirty="0"/>
-              <a:t>Domestic output and imports tables </a:t>
-            </a:r>
-            <a:r>
-              <a:rPr lang="fr-CH" dirty="0" err="1"/>
-              <a:t>from</a:t>
-            </a:r>
-            <a:r>
-              <a:rPr lang="fr-CH" dirty="0"/>
-              <a:t> the OECD </a:t>
-            </a:r>
-            <a:r>
-              <a:rPr lang="fr-CH" dirty="0" err="1"/>
-              <a:t>simulate</a:t>
-            </a:r>
-            <a:r>
-              <a:rPr lang="fr-CH" dirty="0"/>
-              <a:t> </a:t>
-            </a:r>
-            <a:r>
-              <a:rPr lang="fr-CH" dirty="0" err="1"/>
-              <a:t>shocks</a:t>
-            </a:r>
-            <a:r>
-              <a:rPr lang="fr-CH" dirty="0"/>
-              <a:t> more relevant to the </a:t>
-            </a:r>
-            <a:r>
-              <a:rPr lang="fr-CH" dirty="0" err="1"/>
-              <a:t>research</a:t>
-            </a:r>
-            <a:r>
-              <a:rPr lang="fr-CH" dirty="0"/>
-              <a:t> question, </a:t>
-            </a:r>
-            <a:r>
-              <a:rPr lang="fr-CH" dirty="0" err="1"/>
-              <a:t>especially</a:t>
-            </a:r>
-            <a:r>
-              <a:rPr lang="fr-CH" dirty="0"/>
-              <a:t> </a:t>
-            </a:r>
-            <a:r>
-              <a:rPr lang="fr-CH" dirty="0" err="1"/>
-              <a:t>Switzerland's</a:t>
-            </a:r>
-            <a:r>
-              <a:rPr lang="fr-CH" dirty="0"/>
-              <a:t> </a:t>
-            </a:r>
-            <a:r>
-              <a:rPr lang="fr-CH" dirty="0" err="1"/>
-              <a:t>resistance</a:t>
-            </a:r>
-            <a:r>
-              <a:rPr lang="fr-CH" dirty="0"/>
-              <a:t> to international </a:t>
-            </a:r>
-            <a:r>
-              <a:rPr lang="fr-CH" dirty="0" err="1"/>
-              <a:t>price</a:t>
-            </a:r>
-            <a:r>
-              <a:rPr lang="fr-CH" dirty="0"/>
-              <a:t> </a:t>
-            </a:r>
-            <a:r>
-              <a:rPr lang="fr-CH" dirty="0" err="1"/>
-              <a:t>shocks</a:t>
-            </a:r>
-            <a:endParaRPr lang="fr-CH" dirty="0"/>
+              <a:rPr lang="en-US" noProof="0" dirty="0"/>
+              <a:t>Using domestic output and imports tables from the OECD to simulate shocks more relevant to the research question, especially Switzerland's resistance to international price shocks</a:t>
+            </a:r>
           </a:p>
           <a:p>
             <a:pPr lvl="1"/>
-            <a:endParaRPr lang="fr-CH" dirty="0"/>
+            <a:r>
+              <a:rPr lang="en-US" noProof="0" dirty="0"/>
+              <a:t>Going beyond a simple political coalition (bourgeois bloc) approach and identify the social blocs which support the institutions of the Swiss high price island (for instance through an analysis of social/policy expectations)</a:t>
+            </a:r>
+          </a:p>
+          <a:p>
+            <a:pPr lvl="1"/>
+            <a:endParaRPr lang="en-US" noProof="0" dirty="0"/>
           </a:p>
         </p:txBody>
       </p:sp>
@@ -4852,50 +3797,29 @@
             <p:ph type="title"/>
           </p:nvPr>
         </p:nvSpPr>
-        <p:spPr/>
-        <p:txBody>
-          <a:bodyPr/>
-          <a:lstStyle/>
-          <a:p>
-            <a:r>
-              <a:rPr lang="fr-CH" dirty="0" err="1"/>
-              <a:t>Research</a:t>
-            </a:r>
-            <a:r>
-              <a:rPr lang="fr-CH" dirty="0"/>
-              <a:t> Question: </a:t>
-            </a:r>
-            <a:r>
-              <a:rPr lang="fr-CH" dirty="0" err="1"/>
-              <a:t>why</a:t>
-            </a:r>
-            <a:r>
-              <a:rPr lang="fr-CH" dirty="0"/>
-              <a:t> </a:t>
-            </a:r>
-            <a:r>
-              <a:rPr lang="fr-CH" dirty="0" err="1"/>
-              <a:t>does</a:t>
-            </a:r>
-            <a:r>
-              <a:rPr lang="fr-CH" dirty="0"/>
-              <a:t> </a:t>
-            </a:r>
-            <a:r>
-              <a:rPr lang="fr-CH" dirty="0" err="1"/>
-              <a:t>Switzerland</a:t>
-            </a:r>
-            <a:r>
-              <a:rPr lang="fr-CH" dirty="0"/>
-              <a:t> have </a:t>
-            </a:r>
-            <a:r>
-              <a:rPr lang="fr-CH" dirty="0" err="1"/>
-              <a:t>lower</a:t>
-            </a:r>
-            <a:r>
-              <a:rPr lang="fr-CH" dirty="0"/>
-              <a:t> inflation rates ?</a:t>
+        <p:spPr>
+          <a:xfrm>
+            <a:off x="0" y="1"/>
+            <a:ext cx="12192000" cy="1536191"/>
+          </a:xfrm>
+        </p:spPr>
+        <p:txBody>
+          <a:bodyPr>
+            <a:normAutofit/>
+          </a:bodyPr>
+          <a:lstStyle/>
+          <a:p>
+            <a:r>
+              <a:rPr lang="en-US" noProof="0" dirty="0"/>
+              <a:t>Research Question: why does Switzerland have lower inflation rates and is so resistant to </a:t>
+            </a:r>
+            <a:r>
+              <a:rPr lang="en-US" noProof="0" dirty="0" err="1"/>
+              <a:t>shockflation</a:t>
+            </a:r>
+            <a:r>
+              <a:rPr lang="en-US" noProof="0" dirty="0"/>
+              <a:t> ?</a:t>
             </a:r>
           </a:p>
         </p:txBody>
@@ -5002,7 +3926,7 @@
           <a:lstStyle/>
           <a:p>
             <a:r>
-              <a:rPr lang="fr-CH" sz="1050" dirty="0"/>
+              <a:rPr lang="en-US" sz="1050" noProof="0" dirty="0"/>
               <a:t>National CPI indices, source: OECD</a:t>
             </a:r>
           </a:p>
@@ -5060,14 +3984,9 @@
           <a:lstStyle/>
           <a:p>
             <a:r>
-              <a:rPr lang="fr-CH" dirty="0"/>
-              <a:t>Structure of the </a:t>
-            </a:r>
-            <a:r>
-              <a:rPr lang="fr-CH" dirty="0" err="1"/>
-              <a:t>paper</a:t>
-            </a:r>
-            <a:endParaRPr lang="fr-CH" dirty="0"/>
+              <a:rPr lang="en-US" noProof="0" dirty="0"/>
+              <a:t>Structure of the paper</a:t>
+            </a:r>
           </a:p>
         </p:txBody>
       </p:sp>
@@ -5095,302 +4014,65 @@
           <a:lstStyle/>
           <a:p>
             <a:r>
-              <a:rPr lang="fr-CH" dirty="0"/>
+              <a:rPr lang="en-US" noProof="0" dirty="0"/>
               <a:t>Introduction</a:t>
             </a:r>
           </a:p>
           <a:p>
             <a:pPr lvl="1"/>
             <a:r>
-              <a:rPr lang="fr-CH" dirty="0"/>
-              <a:t> Main </a:t>
-            </a:r>
-            <a:r>
-              <a:rPr lang="fr-CH" dirty="0" err="1"/>
-              <a:t>stylized</a:t>
-            </a:r>
-            <a:r>
-              <a:rPr lang="fr-CH" dirty="0"/>
-              <a:t> </a:t>
-            </a:r>
-            <a:r>
-              <a:rPr lang="fr-CH" dirty="0" err="1"/>
-              <a:t>facts</a:t>
-            </a:r>
-            <a:r>
-              <a:rPr lang="fr-CH" dirty="0"/>
-              <a:t> on Swiss </a:t>
-            </a:r>
-            <a:r>
-              <a:rPr lang="fr-CH" dirty="0" err="1"/>
-              <a:t>prices</a:t>
-            </a:r>
-            <a:r>
-              <a:rPr lang="fr-CH" dirty="0"/>
-              <a:t>: </a:t>
-            </a:r>
-            <a:r>
-              <a:rPr lang="fr-CH" dirty="0" err="1"/>
-              <a:t>low</a:t>
-            </a:r>
-            <a:r>
-              <a:rPr lang="fr-CH" dirty="0"/>
-              <a:t> inflation </a:t>
-            </a:r>
-            <a:r>
-              <a:rPr lang="fr-CH" dirty="0" err="1"/>
-              <a:t>combined</a:t>
-            </a:r>
-            <a:r>
-              <a:rPr lang="fr-CH" dirty="0"/>
-              <a:t> </a:t>
-            </a:r>
-            <a:r>
-              <a:rPr lang="fr-CH" dirty="0" err="1"/>
-              <a:t>with</a:t>
-            </a:r>
-            <a:r>
-              <a:rPr lang="fr-CH" dirty="0"/>
-              <a:t> a </a:t>
-            </a:r>
-            <a:r>
-              <a:rPr lang="fr-CH" dirty="0" err="1"/>
-              <a:t>very</a:t>
-            </a:r>
-            <a:r>
-              <a:rPr lang="fr-CH" dirty="0"/>
-              <a:t> high </a:t>
-            </a:r>
-            <a:r>
-              <a:rPr lang="fr-CH" dirty="0" err="1"/>
-              <a:t>price</a:t>
-            </a:r>
-            <a:r>
-              <a:rPr lang="fr-CH" dirty="0"/>
-              <a:t> </a:t>
-            </a:r>
-            <a:r>
-              <a:rPr lang="fr-CH" dirty="0" err="1"/>
-              <a:t>level</a:t>
-            </a:r>
-            <a:endParaRPr lang="fr-CH" dirty="0"/>
-          </a:p>
-          <a:p>
-            <a:r>
-              <a:rPr lang="fr-CH" dirty="0" err="1"/>
-              <a:t>Literature</a:t>
-            </a:r>
-            <a:r>
-              <a:rPr lang="fr-CH" dirty="0"/>
-              <a:t> </a:t>
-            </a:r>
-            <a:r>
-              <a:rPr lang="fr-CH" dirty="0" err="1"/>
-              <a:t>review</a:t>
-            </a:r>
-            <a:r>
-              <a:rPr lang="fr-CH" dirty="0"/>
-              <a:t> of </a:t>
-            </a:r>
-            <a:r>
-              <a:rPr lang="fr-CH" dirty="0" err="1"/>
-              <a:t>three</a:t>
-            </a:r>
-            <a:r>
-              <a:rPr lang="fr-CH" dirty="0"/>
-              <a:t> types of </a:t>
-            </a:r>
-            <a:r>
-              <a:rPr lang="fr-CH" dirty="0" err="1"/>
-              <a:t>explanation</a:t>
-            </a:r>
-            <a:r>
-              <a:rPr lang="fr-CH" dirty="0"/>
-              <a:t>:</a:t>
+              <a:rPr lang="en-US" noProof="0" dirty="0"/>
+              <a:t> Main stylized facts on Swiss prices: low inflation combined with a very high price level</a:t>
+            </a:r>
+          </a:p>
+          <a:p>
+            <a:r>
+              <a:rPr lang="en-US" noProof="0" dirty="0"/>
+              <a:t>Literature review of three types of explanation:</a:t>
             </a:r>
           </a:p>
           <a:p>
             <a:pPr lvl="1"/>
             <a:r>
-              <a:rPr lang="fr-CH" dirty="0"/>
-              <a:t>(1) The </a:t>
-            </a:r>
-            <a:r>
-              <a:rPr lang="fr-CH" dirty="0" err="1"/>
-              <a:t>strength</a:t>
-            </a:r>
-            <a:r>
-              <a:rPr lang="fr-CH" dirty="0"/>
-              <a:t> of the Swiss franc due to </a:t>
-            </a:r>
-            <a:r>
-              <a:rPr lang="fr-CH" dirty="0" err="1"/>
-              <a:t>its</a:t>
-            </a:r>
-            <a:r>
-              <a:rPr lang="fr-CH" dirty="0"/>
-              <a:t> </a:t>
-            </a:r>
-            <a:r>
-              <a:rPr lang="fr-CH" dirty="0" err="1"/>
-              <a:t>safe</a:t>
-            </a:r>
-            <a:r>
-              <a:rPr lang="fr-CH" dirty="0"/>
-              <a:t> </a:t>
-            </a:r>
-            <a:r>
-              <a:rPr lang="fr-CH" dirty="0" err="1"/>
-              <a:t>haven</a:t>
-            </a:r>
-            <a:r>
-              <a:rPr lang="fr-CH" dirty="0"/>
-              <a:t> </a:t>
-            </a:r>
-            <a:r>
-              <a:rPr lang="fr-CH" dirty="0" err="1"/>
-              <a:t>status</a:t>
-            </a:r>
-            <a:endParaRPr lang="fr-CH" dirty="0"/>
+              <a:rPr lang="en-US" noProof="0" dirty="0"/>
+              <a:t>(1) The strength of the Swiss franc due to its safe haven status</a:t>
+            </a:r>
           </a:p>
           <a:p>
             <a:pPr lvl="1"/>
             <a:r>
-              <a:rPr lang="fr-CH" dirty="0"/>
-              <a:t>(2) The construction of the Swiss consumer </a:t>
-            </a:r>
-            <a:r>
-              <a:rPr lang="fr-CH" dirty="0" err="1"/>
-              <a:t>price</a:t>
-            </a:r>
-            <a:r>
-              <a:rPr lang="fr-CH" dirty="0"/>
-              <a:t> index</a:t>
+              <a:rPr lang="en-US" noProof="0" dirty="0"/>
+              <a:t>(2) The construction of the Swiss consumer price index</a:t>
             </a:r>
           </a:p>
           <a:p>
             <a:pPr lvl="1"/>
             <a:r>
-              <a:rPr lang="fr-CH" dirty="0"/>
-              <a:t>(3) The </a:t>
-            </a:r>
-            <a:r>
-              <a:rPr lang="fr-CH" dirty="0" err="1"/>
-              <a:t>role</a:t>
-            </a:r>
-            <a:r>
-              <a:rPr lang="fr-CH" dirty="0"/>
-              <a:t> of </a:t>
-            </a:r>
-            <a:r>
-              <a:rPr lang="fr-CH" dirty="0" err="1"/>
-              <a:t>price</a:t>
-            </a:r>
-            <a:r>
-              <a:rPr lang="fr-CH" dirty="0"/>
-              <a:t> administration</a:t>
-            </a:r>
-          </a:p>
-          <a:p>
-            <a:r>
-              <a:rPr lang="fr-CH" dirty="0"/>
-              <a:t>The </a:t>
-            </a:r>
-            <a:r>
-              <a:rPr lang="fr-CH" dirty="0" err="1"/>
-              <a:t>role</a:t>
-            </a:r>
-            <a:r>
-              <a:rPr lang="fr-CH" dirty="0"/>
-              <a:t> of </a:t>
-            </a:r>
-            <a:r>
-              <a:rPr lang="fr-CH" dirty="0" err="1"/>
-              <a:t>price</a:t>
-            </a:r>
-            <a:r>
-              <a:rPr lang="fr-CH" dirty="0"/>
-              <a:t> administration in </a:t>
-            </a:r>
-            <a:r>
-              <a:rPr lang="fr-CH" dirty="0" err="1"/>
-              <a:t>systemically</a:t>
-            </a:r>
-            <a:r>
-              <a:rPr lang="fr-CH" dirty="0"/>
-              <a:t> </a:t>
-            </a:r>
-            <a:r>
-              <a:rPr lang="fr-CH" dirty="0" err="1"/>
-              <a:t>significant</a:t>
-            </a:r>
-            <a:r>
-              <a:rPr lang="fr-CH" dirty="0"/>
-              <a:t> </a:t>
-            </a:r>
-            <a:r>
-              <a:rPr lang="fr-CH" dirty="0" err="1"/>
-              <a:t>sectors</a:t>
-            </a:r>
-            <a:endParaRPr lang="fr-CH" dirty="0"/>
-          </a:p>
-          <a:p>
-            <a:r>
-              <a:rPr lang="fr-CH" dirty="0"/>
-              <a:t>The </a:t>
-            </a:r>
-            <a:r>
-              <a:rPr lang="fr-CH" dirty="0" err="1"/>
-              <a:t>energy</a:t>
-            </a:r>
-            <a:r>
-              <a:rPr lang="fr-CH" dirty="0"/>
-              <a:t> </a:t>
-            </a:r>
-            <a:r>
-              <a:rPr lang="fr-CH" dirty="0" err="1"/>
-              <a:t>sector</a:t>
-            </a:r>
-            <a:endParaRPr lang="fr-CH" dirty="0"/>
-          </a:p>
-          <a:p>
-            <a:r>
-              <a:rPr lang="fr-CH" dirty="0"/>
-              <a:t>The socio-</a:t>
-            </a:r>
-            <a:r>
-              <a:rPr lang="fr-CH" dirty="0" err="1"/>
-              <a:t>political</a:t>
-            </a:r>
-            <a:r>
-              <a:rPr lang="fr-CH" dirty="0"/>
-              <a:t> coalition </a:t>
-            </a:r>
-            <a:r>
-              <a:rPr lang="fr-CH" dirty="0" err="1"/>
-              <a:t>behind</a:t>
-            </a:r>
-            <a:r>
-              <a:rPr lang="fr-CH" dirty="0"/>
-              <a:t> the </a:t>
-            </a:r>
-            <a:r>
-              <a:rPr lang="fr-CH" dirty="0" err="1"/>
-              <a:t>island</a:t>
-            </a:r>
-            <a:r>
-              <a:rPr lang="fr-CH" dirty="0"/>
-              <a:t> of high </a:t>
-            </a:r>
-            <a:r>
-              <a:rPr lang="fr-CH" dirty="0" err="1"/>
-              <a:t>prices</a:t>
-            </a:r>
-            <a:endParaRPr lang="fr-CH" dirty="0"/>
+              <a:rPr lang="en-US" noProof="0" dirty="0"/>
+              <a:t>(3) The role of price administration</a:t>
+            </a:r>
+          </a:p>
+          <a:p>
+            <a:r>
+              <a:rPr lang="en-US" noProof="0" dirty="0"/>
+              <a:t>The role of price administration in systemically significant sectors</a:t>
+            </a:r>
+          </a:p>
+          <a:p>
+            <a:r>
+              <a:rPr lang="en-US" noProof="0" dirty="0"/>
+              <a:t>The energy sector</a:t>
+            </a:r>
+          </a:p>
+          <a:p>
+            <a:r>
+              <a:rPr lang="en-US" noProof="0" dirty="0"/>
+              <a:t>The socio-political coalition behind the island of high prices</a:t>
+            </a:r>
           </a:p>
           <a:p>
             <a:pPr lvl="1"/>
-            <a:endParaRPr lang="fr-CH" dirty="0"/>
+            <a:endParaRPr lang="en-US" noProof="0" dirty="0"/>
           </a:p>
         </p:txBody>
       </p:sp>
@@ -5446,24 +4128,8 @@
           <a:lstStyle/>
           <a:p>
             <a:r>
-              <a:rPr lang="fr-CH" dirty="0"/>
-              <a:t>The </a:t>
-            </a:r>
-            <a:r>
-              <a:rPr lang="fr-CH" dirty="0" err="1"/>
-              <a:t>role</a:t>
-            </a:r>
-            <a:r>
-              <a:rPr lang="fr-CH" dirty="0"/>
-              <a:t> of </a:t>
-            </a:r>
-            <a:r>
-              <a:rPr lang="fr-CH" dirty="0" err="1"/>
-              <a:t>price</a:t>
-            </a:r>
-            <a:r>
-              <a:rPr lang="fr-CH" dirty="0"/>
-              <a:t> administration</a:t>
+              <a:rPr lang="en-US" noProof="0" dirty="0"/>
+              <a:t>The role of price administration</a:t>
             </a:r>
           </a:p>
         </p:txBody>
@@ -5491,162 +4157,20 @@
           </a:xfrm>
         </p:spPr>
         <p:txBody>
-          <a:bodyPr/>
-          <a:lstStyle/>
-          <a:p>
-            <a:r>
-              <a:rPr lang="fr-CH" dirty="0" err="1"/>
-              <a:t>Switzerland</a:t>
-            </a:r>
-            <a:r>
-              <a:rPr lang="fr-CH" dirty="0"/>
-              <a:t> has the </a:t>
-            </a:r>
-            <a:r>
-              <a:rPr lang="fr-CH" dirty="0" err="1"/>
-              <a:t>highest</a:t>
-            </a:r>
-            <a:r>
-              <a:rPr lang="fr-CH" dirty="0"/>
-              <a:t> </a:t>
-            </a:r>
-            <a:r>
-              <a:rPr lang="fr-CH" dirty="0" err="1"/>
-              <a:t>share</a:t>
-            </a:r>
-            <a:r>
-              <a:rPr lang="fr-CH" dirty="0"/>
-              <a:t> of </a:t>
-            </a:r>
-            <a:r>
-              <a:rPr lang="fr-CH" dirty="0" err="1"/>
-              <a:t>administered</a:t>
-            </a:r>
-            <a:r>
-              <a:rPr lang="fr-CH" dirty="0"/>
-              <a:t> </a:t>
-            </a:r>
-            <a:r>
-              <a:rPr lang="fr-CH" dirty="0" err="1"/>
-              <a:t>prices</a:t>
-            </a:r>
-            <a:r>
-              <a:rPr lang="fr-CH" dirty="0"/>
-              <a:t> in </a:t>
-            </a:r>
-            <a:r>
-              <a:rPr lang="fr-CH" dirty="0" err="1"/>
-              <a:t>its</a:t>
-            </a:r>
-            <a:r>
-              <a:rPr lang="fr-CH" dirty="0"/>
-              <a:t> HCPI </a:t>
-            </a:r>
-            <a:r>
-              <a:rPr lang="fr-CH" dirty="0" err="1"/>
-              <a:t>compared</a:t>
-            </a:r>
-            <a:r>
-              <a:rPr lang="fr-CH" dirty="0"/>
-              <a:t> to </a:t>
-            </a:r>
-            <a:r>
-              <a:rPr lang="fr-CH" dirty="0" err="1"/>
-              <a:t>other</a:t>
-            </a:r>
-            <a:r>
-              <a:rPr lang="fr-CH" dirty="0"/>
-              <a:t> </a:t>
-            </a:r>
-            <a:r>
-              <a:rPr lang="fr-CH" dirty="0" err="1"/>
-              <a:t>European</a:t>
-            </a:r>
-            <a:r>
-              <a:rPr lang="fr-CH" dirty="0"/>
-              <a:t> countries (</a:t>
-            </a:r>
-            <a:r>
-              <a:rPr lang="fr-CH" dirty="0" err="1"/>
-              <a:t>around</a:t>
-            </a:r>
-            <a:r>
-              <a:rPr lang="fr-CH" dirty="0"/>
-              <a:t> 30%)</a:t>
-            </a:r>
-          </a:p>
-          <a:p>
-            <a:r>
-              <a:rPr lang="fr-CH" dirty="0" err="1"/>
-              <a:t>Prices</a:t>
-            </a:r>
-            <a:r>
-              <a:rPr lang="fr-CH" dirty="0"/>
-              <a:t> are for </a:t>
-            </a:r>
-            <a:r>
-              <a:rPr lang="fr-CH" dirty="0" err="1"/>
-              <a:t>example</a:t>
-            </a:r>
-            <a:r>
-              <a:rPr lang="fr-CH" dirty="0"/>
-              <a:t> </a:t>
-            </a:r>
-            <a:r>
-              <a:rPr lang="fr-CH" dirty="0" err="1"/>
-              <a:t>administered</a:t>
-            </a:r>
-            <a:r>
-              <a:rPr lang="fr-CH" dirty="0"/>
-              <a:t> for </a:t>
-            </a:r>
-            <a:r>
-              <a:rPr lang="fr-CH" dirty="0" err="1"/>
-              <a:t>energy</a:t>
-            </a:r>
-            <a:r>
-              <a:rPr lang="fr-CH" dirty="0"/>
-              <a:t> (</a:t>
-            </a:r>
-            <a:r>
-              <a:rPr lang="fr-CH" dirty="0" err="1"/>
-              <a:t>mainly</a:t>
-            </a:r>
-            <a:r>
-              <a:rPr lang="fr-CH" dirty="0"/>
-              <a:t> </a:t>
-            </a:r>
-            <a:r>
-              <a:rPr lang="fr-CH" dirty="0" err="1"/>
-              <a:t>electricity</a:t>
-            </a:r>
-            <a:r>
-              <a:rPr lang="fr-CH" dirty="0"/>
-              <a:t>), district </a:t>
-            </a:r>
-            <a:r>
-              <a:rPr lang="fr-CH" dirty="0" err="1"/>
-              <a:t>heating</a:t>
-            </a:r>
-            <a:r>
-              <a:rPr lang="fr-CH" dirty="0"/>
-              <a:t>, </a:t>
-            </a:r>
-            <a:r>
-              <a:rPr lang="fr-CH" dirty="0" err="1"/>
-              <a:t>food</a:t>
-            </a:r>
-            <a:r>
-              <a:rPr lang="fr-CH" dirty="0"/>
-              <a:t> </a:t>
-            </a:r>
-            <a:r>
-              <a:rPr lang="fr-CH" dirty="0" err="1"/>
-              <a:t>products</a:t>
-            </a:r>
-            <a:r>
-              <a:rPr lang="fr-CH" dirty="0"/>
-              <a:t>, public transports…</a:t>
+          <a:bodyPr>
+            <a:normAutofit/>
+          </a:bodyPr>
+          <a:lstStyle/>
+          <a:p>
+            <a:r>
+              <a:rPr lang="en-US" noProof="0" dirty="0"/>
+              <a:t>Switzerland has the highest share of administered prices in its HCPI compared to other European countries (around 30%)</a:t>
+            </a:r>
+          </a:p>
+          <a:p>
+            <a:r>
+              <a:rPr lang="en-US" noProof="0" dirty="0"/>
+              <a:t>Prices are for example administered for energy (mainly electricity), district heating, pharmaceutical products, public transports…</a:t>
             </a:r>
           </a:p>
         </p:txBody>
@@ -5733,46 +4257,9 @@
           <a:lstStyle/>
           <a:p>
             <a:r>
-              <a:rPr lang="fr-CH" dirty="0"/>
-              <a:t>Arguments </a:t>
-            </a:r>
-            <a:r>
-              <a:rPr lang="fr-CH" dirty="0" err="1"/>
-              <a:t>against</a:t>
-            </a:r>
-            <a:r>
-              <a:rPr lang="fr-CH" dirty="0"/>
-              <a:t> an </a:t>
-            </a:r>
-            <a:r>
-              <a:rPr lang="fr-CH" dirty="0" err="1"/>
-              <a:t>effect</a:t>
-            </a:r>
-            <a:r>
-              <a:rPr lang="fr-CH" dirty="0"/>
-              <a:t> of </a:t>
-            </a:r>
-            <a:r>
-              <a:rPr lang="fr-CH" dirty="0" err="1"/>
-              <a:t>price</a:t>
-            </a:r>
-            <a:r>
-              <a:rPr lang="fr-CH" dirty="0"/>
-              <a:t> administration on </a:t>
-            </a:r>
-            <a:r>
-              <a:rPr lang="fr-CH" dirty="0" err="1"/>
-              <a:t>low</a:t>
-            </a:r>
-            <a:r>
-              <a:rPr lang="fr-CH" dirty="0"/>
-              <a:t> inflation in </a:t>
-            </a:r>
-            <a:r>
-              <a:rPr lang="fr-CH" dirty="0" err="1"/>
-              <a:t>Switzerland</a:t>
-            </a:r>
-            <a:endParaRPr lang="fr-CH" dirty="0"/>
+              <a:rPr lang="en-US" noProof="0" dirty="0"/>
+              <a:t>Arguments against an effect of price administration on low inflation in Switzerland</a:t>
+            </a:r>
           </a:p>
         </p:txBody>
       </p:sp>
@@ -5803,96 +4290,16 @@
           <a:lstStyle/>
           <a:p>
             <a:r>
-              <a:rPr lang="fr-CH" dirty="0"/>
+              <a:rPr lang="en-US" noProof="0" dirty="0"/>
               <a:t>Auer el al. (2025): </a:t>
             </a:r>
             <a:r>
-              <a:rPr lang="fr-CH" dirty="0" err="1"/>
+              <a:rPr lang="en-US" noProof="0" dirty="0" err="1"/>
               <a:t>aministered</a:t>
             </a:r>
             <a:r>
-              <a:rPr lang="fr-CH" dirty="0"/>
-              <a:t> </a:t>
-            </a:r>
-            <a:r>
-              <a:rPr lang="fr-CH" dirty="0" err="1"/>
-              <a:t>prices</a:t>
-            </a:r>
-            <a:r>
-              <a:rPr lang="fr-CH" dirty="0"/>
-              <a:t> in </a:t>
-            </a:r>
-            <a:r>
-              <a:rPr lang="fr-CH" dirty="0" err="1"/>
-              <a:t>Switzerland</a:t>
-            </a:r>
-            <a:r>
-              <a:rPr lang="fr-CH" dirty="0"/>
-              <a:t> </a:t>
-            </a:r>
-            <a:r>
-              <a:rPr lang="fr-CH" dirty="0" err="1"/>
-              <a:t>increased</a:t>
-            </a:r>
-            <a:r>
-              <a:rPr lang="fr-CH" dirty="0"/>
-              <a:t> </a:t>
-            </a:r>
-            <a:r>
-              <a:rPr lang="fr-CH" dirty="0" err="1"/>
-              <a:t>less</a:t>
-            </a:r>
-            <a:r>
-              <a:rPr lang="fr-CH" dirty="0"/>
-              <a:t> </a:t>
-            </a:r>
-            <a:r>
-              <a:rPr lang="fr-CH" dirty="0" err="1"/>
-              <a:t>than</a:t>
-            </a:r>
-            <a:r>
-              <a:rPr lang="fr-CH" dirty="0"/>
-              <a:t> in the EU, but </a:t>
-            </a:r>
-            <a:r>
-              <a:rPr lang="fr-CH" dirty="0" err="1"/>
-              <a:t>this</a:t>
-            </a:r>
-            <a:r>
-              <a:rPr lang="fr-CH" dirty="0"/>
-              <a:t> </a:t>
-            </a:r>
-            <a:r>
-              <a:rPr lang="fr-CH" dirty="0" err="1"/>
-              <a:t>is</a:t>
-            </a:r>
-            <a:r>
-              <a:rPr lang="fr-CH" dirty="0"/>
-              <a:t> </a:t>
-            </a:r>
-            <a:r>
-              <a:rPr lang="fr-CH" dirty="0" err="1"/>
-              <a:t>also</a:t>
-            </a:r>
-            <a:r>
-              <a:rPr lang="fr-CH" dirty="0"/>
-              <a:t> the case for non- </a:t>
-            </a:r>
-            <a:r>
-              <a:rPr lang="fr-CH" dirty="0" err="1"/>
-              <a:t>administered</a:t>
-            </a:r>
-            <a:r>
-              <a:rPr lang="fr-CH" dirty="0"/>
-              <a:t> </a:t>
-            </a:r>
-            <a:r>
-              <a:rPr lang="fr-CH" dirty="0" err="1"/>
-              <a:t>prices</a:t>
-            </a:r>
-            <a:r>
-              <a:rPr lang="fr-CH" dirty="0"/>
-              <a:t> (figure on the right)</a:t>
+              <a:rPr lang="en-US" noProof="0" dirty="0"/>
+              <a:t> prices in Switzerland increased less than in the EU, but this is also the case for non- administered prices (figure on the right)</a:t>
             </a:r>
           </a:p>
         </p:txBody>
@@ -5979,40 +4386,8 @@
           <a:lstStyle/>
           <a:p>
             <a:r>
-              <a:rPr lang="fr-CH" dirty="0"/>
-              <a:t>The high </a:t>
-            </a:r>
-            <a:r>
-              <a:rPr lang="fr-CH" dirty="0" err="1"/>
-              <a:t>share</a:t>
-            </a:r>
-            <a:r>
-              <a:rPr lang="fr-CH" dirty="0"/>
-              <a:t> of </a:t>
-            </a:r>
-            <a:r>
-              <a:rPr lang="fr-CH" dirty="0" err="1"/>
-              <a:t>administered</a:t>
-            </a:r>
-            <a:r>
-              <a:rPr lang="fr-CH" dirty="0"/>
-              <a:t> </a:t>
-            </a:r>
-            <a:r>
-              <a:rPr lang="fr-CH" dirty="0" err="1"/>
-              <a:t>prices</a:t>
-            </a:r>
-            <a:r>
-              <a:rPr lang="fr-CH" dirty="0"/>
-              <a:t> in Swiss HCPI: an </a:t>
-            </a:r>
-            <a:r>
-              <a:rPr lang="fr-CH" dirty="0" err="1"/>
-              <a:t>institutional</a:t>
-            </a:r>
-            <a:r>
-              <a:rPr lang="fr-CH" dirty="0"/>
-              <a:t> artefact ?</a:t>
+              <a:rPr lang="en-US" noProof="0" dirty="0"/>
+              <a:t>The high share of administered prices in Swiss HCPI: an institutional artefact ?</a:t>
             </a:r>
           </a:p>
         </p:txBody>
@@ -6041,245 +4416,27 @@
         </p:spPr>
         <p:txBody>
           <a:bodyPr>
-            <a:normAutofit lnSpcReduction="10000"/>
+            <a:normAutofit/>
           </a:bodyPr>
           <a:lstStyle/>
           <a:p>
             <a:r>
-              <a:rPr lang="fr-CH" dirty="0"/>
-              <a:t>Among the 30% </a:t>
-            </a:r>
-            <a:r>
-              <a:rPr lang="fr-CH" dirty="0" err="1"/>
-              <a:t>share</a:t>
-            </a:r>
-            <a:r>
-              <a:rPr lang="fr-CH" dirty="0"/>
-              <a:t> of </a:t>
-            </a:r>
-            <a:r>
-              <a:rPr lang="fr-CH" dirty="0" err="1"/>
-              <a:t>administered</a:t>
-            </a:r>
-            <a:r>
-              <a:rPr lang="fr-CH" dirty="0"/>
-              <a:t> </a:t>
-            </a:r>
-            <a:r>
-              <a:rPr lang="fr-CH" dirty="0" err="1"/>
-              <a:t>prices</a:t>
-            </a:r>
-            <a:r>
-              <a:rPr lang="fr-CH" dirty="0"/>
-              <a:t> (</a:t>
-            </a:r>
-            <a:r>
-              <a:rPr lang="fr-CH" dirty="0" err="1"/>
-              <a:t>APs</a:t>
-            </a:r>
-            <a:r>
-              <a:rPr lang="fr-CH" dirty="0"/>
-              <a:t>) in the Swiss HCPI, </a:t>
-            </a:r>
-            <a:r>
-              <a:rPr lang="fr-CH" dirty="0" err="1"/>
-              <a:t>around</a:t>
-            </a:r>
-            <a:r>
-              <a:rPr lang="fr-CH" dirty="0"/>
-              <a:t> 15% are </a:t>
-            </a:r>
-            <a:r>
-              <a:rPr lang="fr-CH" dirty="0" err="1"/>
-              <a:t>health</a:t>
-            </a:r>
-            <a:r>
-              <a:rPr lang="fr-CH" dirty="0"/>
-              <a:t> </a:t>
-            </a:r>
-            <a:r>
-              <a:rPr lang="fr-CH" dirty="0" err="1"/>
-              <a:t>products</a:t>
-            </a:r>
-            <a:r>
-              <a:rPr lang="fr-CH" dirty="0"/>
-              <a:t> and services</a:t>
-            </a:r>
-          </a:p>
-          <a:p>
-            <a:r>
-              <a:rPr lang="fr-CH" dirty="0"/>
-              <a:t>This high </a:t>
-            </a:r>
-            <a:r>
-              <a:rPr lang="fr-CH" dirty="0" err="1"/>
-              <a:t>share</a:t>
-            </a:r>
-            <a:r>
-              <a:rPr lang="fr-CH" dirty="0"/>
-              <a:t> of </a:t>
-            </a:r>
-            <a:r>
-              <a:rPr lang="fr-CH" dirty="0" err="1"/>
-              <a:t>APs</a:t>
-            </a:r>
-            <a:r>
-              <a:rPr lang="fr-CH" dirty="0"/>
-              <a:t>, </a:t>
-            </a:r>
-            <a:r>
-              <a:rPr lang="fr-CH" dirty="0" err="1"/>
-              <a:t>rather</a:t>
-            </a:r>
-            <a:r>
-              <a:rPr lang="fr-CH" dirty="0"/>
-              <a:t> </a:t>
-            </a:r>
-            <a:r>
-              <a:rPr lang="fr-CH" dirty="0" err="1"/>
-              <a:t>than</a:t>
-            </a:r>
-            <a:r>
-              <a:rPr lang="fr-CH" dirty="0"/>
-              <a:t> an active </a:t>
-            </a:r>
-            <a:r>
-              <a:rPr lang="fr-CH" dirty="0" err="1"/>
-              <a:t>policy</a:t>
-            </a:r>
-            <a:r>
-              <a:rPr lang="fr-CH" dirty="0"/>
-              <a:t> of </a:t>
-            </a:r>
-            <a:r>
-              <a:rPr lang="fr-CH" dirty="0" err="1"/>
-              <a:t>price</a:t>
-            </a:r>
-            <a:r>
-              <a:rPr lang="fr-CH" dirty="0"/>
-              <a:t> control, </a:t>
-            </a:r>
-            <a:r>
-              <a:rPr lang="fr-CH" dirty="0" err="1"/>
-              <a:t>rather</a:t>
-            </a:r>
-            <a:r>
-              <a:rPr lang="fr-CH" dirty="0"/>
-              <a:t> </a:t>
-            </a:r>
-            <a:r>
-              <a:rPr lang="fr-CH" dirty="0" err="1"/>
-              <a:t>reflects</a:t>
-            </a:r>
-            <a:r>
-              <a:rPr lang="fr-CH" dirty="0"/>
-              <a:t> the </a:t>
-            </a:r>
-            <a:r>
-              <a:rPr lang="fr-CH" dirty="0" err="1"/>
-              <a:t>peculiar</a:t>
-            </a:r>
-            <a:r>
-              <a:rPr lang="fr-CH" dirty="0"/>
-              <a:t> Swiss </a:t>
-            </a:r>
-            <a:r>
-              <a:rPr lang="fr-CH" dirty="0" err="1"/>
-              <a:t>mandatory</a:t>
-            </a:r>
-            <a:r>
-              <a:rPr lang="fr-CH" dirty="0"/>
-              <a:t> </a:t>
-            </a:r>
-            <a:r>
-              <a:rPr lang="fr-CH" dirty="0" err="1"/>
-              <a:t>health</a:t>
-            </a:r>
-            <a:r>
-              <a:rPr lang="fr-CH" dirty="0"/>
-              <a:t> </a:t>
-            </a:r>
-            <a:r>
-              <a:rPr lang="fr-CH" dirty="0" err="1"/>
-              <a:t>insurance</a:t>
-            </a:r>
-            <a:r>
-              <a:rPr lang="fr-CH" dirty="0"/>
-              <a:t> system </a:t>
-            </a:r>
-            <a:r>
-              <a:rPr lang="fr-CH" dirty="0">
+              <a:rPr lang="en-US" noProof="0" dirty="0"/>
+              <a:t>Among the 30% share of administered prices (APs) in the Swiss HCPI, around 15% are healthcare products and services</a:t>
+            </a:r>
+          </a:p>
+          <a:p>
+            <a:r>
+              <a:rPr lang="en-US" noProof="0" dirty="0"/>
+              <a:t>This high share of APs, rather than an active policy of price control, rather reflects the peculiar Swiss mandatory health insurance system </a:t>
+            </a:r>
+            <a:r>
+              <a:rPr lang="en-US" noProof="0" dirty="0">
                 <a:sym typeface="Wingdings" panose="05000000000000000000" pitchFamily="2" charset="2"/>
               </a:rPr>
-              <a:t> Swiss </a:t>
-            </a:r>
-            <a:r>
-              <a:rPr lang="fr-CH" dirty="0" err="1">
-                <a:sym typeface="Wingdings" panose="05000000000000000000" pitchFamily="2" charset="2"/>
-              </a:rPr>
-              <a:t>healthcare</a:t>
-            </a:r>
-            <a:r>
-              <a:rPr lang="fr-CH" dirty="0">
-                <a:sym typeface="Wingdings" panose="05000000000000000000" pitchFamily="2" charset="2"/>
-              </a:rPr>
-              <a:t> </a:t>
-            </a:r>
-            <a:r>
-              <a:rPr lang="fr-CH" dirty="0" err="1">
-                <a:sym typeface="Wingdings" panose="05000000000000000000" pitchFamily="2" charset="2"/>
-              </a:rPr>
-              <a:t>costs</a:t>
-            </a:r>
-            <a:r>
-              <a:rPr lang="fr-CH" dirty="0">
-                <a:sym typeface="Wingdings" panose="05000000000000000000" pitchFamily="2" charset="2"/>
-              </a:rPr>
-              <a:t> are not </a:t>
-            </a:r>
-            <a:r>
-              <a:rPr lang="fr-CH" dirty="0" err="1">
-                <a:sym typeface="Wingdings" panose="05000000000000000000" pitchFamily="2" charset="2"/>
-              </a:rPr>
-              <a:t>covered</a:t>
-            </a:r>
-            <a:r>
-              <a:rPr lang="fr-CH" dirty="0">
-                <a:sym typeface="Wingdings" panose="05000000000000000000" pitchFamily="2" charset="2"/>
-              </a:rPr>
-              <a:t> </a:t>
-            </a:r>
-            <a:r>
-              <a:rPr lang="fr-CH" dirty="0" err="1">
-                <a:sym typeface="Wingdings" panose="05000000000000000000" pitchFamily="2" charset="2"/>
-              </a:rPr>
-              <a:t>until</a:t>
-            </a:r>
-            <a:r>
-              <a:rPr lang="fr-CH" dirty="0">
-                <a:sym typeface="Wingdings" panose="05000000000000000000" pitchFamily="2" charset="2"/>
-              </a:rPr>
-              <a:t> a franchise (minimum 300 francs) </a:t>
-            </a:r>
-            <a:r>
-              <a:rPr lang="fr-CH" dirty="0" err="1">
-                <a:sym typeface="Wingdings" panose="05000000000000000000" pitchFamily="2" charset="2"/>
-              </a:rPr>
-              <a:t>is</a:t>
-            </a:r>
-            <a:r>
-              <a:rPr lang="fr-CH" dirty="0">
-                <a:sym typeface="Wingdings" panose="05000000000000000000" pitchFamily="2" charset="2"/>
-              </a:rPr>
-              <a:t> </a:t>
-            </a:r>
-            <a:r>
-              <a:rPr lang="fr-CH" dirty="0" err="1">
-                <a:sym typeface="Wingdings" panose="05000000000000000000" pitchFamily="2" charset="2"/>
-              </a:rPr>
-              <a:t>reached</a:t>
-            </a:r>
-            <a:endParaRPr lang="fr-CH" dirty="0"/>
+              <a:t> Swiss healthcare costs are not covered until a franchise (minimum 300 francs) is reached</a:t>
+            </a:r>
+            <a:endParaRPr lang="en-US" noProof="0" dirty="0"/>
           </a:p>
         </p:txBody>
       </p:sp>
@@ -6342,18 +4499,41 @@
           <a:lstStyle/>
           <a:p>
             <a:r>
-              <a:rPr lang="de-DE" sz="1400" dirty="0"/>
+              <a:rPr lang="en-US" sz="1400" noProof="0" dirty="0"/>
               <a:t>Lukas Mergele et al., « </a:t>
             </a:r>
             <a:r>
-              <a:rPr lang="de-DE" sz="1400" dirty="0" err="1"/>
+              <a:rPr lang="en-US" sz="1400" noProof="0" dirty="0" err="1"/>
               <a:t>Administriete</a:t>
             </a:r>
             <a:r>
-              <a:rPr lang="de-DE" sz="1400" dirty="0"/>
-              <a:t> Preise », Grundlagen für die Wirtschaftspolitik (Bern), nᵒ 62 (2026).</a:t>
-            </a:r>
-            <a:endParaRPr lang="fr-CH" sz="1400" dirty="0"/>
+              <a:rPr lang="en-US" sz="1400" noProof="0" dirty="0"/>
+              <a:t> </a:t>
+            </a:r>
+            <a:r>
+              <a:rPr lang="en-US" sz="1400" noProof="0" dirty="0" err="1"/>
+              <a:t>Preise</a:t>
+            </a:r>
+            <a:r>
+              <a:rPr lang="en-US" sz="1400" noProof="0" dirty="0"/>
+              <a:t> », </a:t>
+            </a:r>
+            <a:r>
+              <a:rPr lang="en-US" sz="1400" noProof="0" dirty="0" err="1"/>
+              <a:t>Grundlagen</a:t>
+            </a:r>
+            <a:r>
+              <a:rPr lang="en-US" sz="1400" noProof="0" dirty="0"/>
+              <a:t> für die </a:t>
+            </a:r>
+            <a:r>
+              <a:rPr lang="en-US" sz="1400" noProof="0" dirty="0" err="1"/>
+              <a:t>Wirtschaftspolitik</a:t>
+            </a:r>
+            <a:r>
+              <a:rPr lang="en-US" sz="1400" noProof="0" dirty="0"/>
+              <a:t> (Bern), nᵒ 62 (2026).</a:t>
+            </a:r>
           </a:p>
         </p:txBody>
       </p:sp>
@@ -6416,54 +4596,9 @@
           <a:lstStyle/>
           <a:p>
             <a:r>
-              <a:rPr lang="fr-CH" sz="3200" dirty="0"/>
-              <a:t>Our </a:t>
-            </a:r>
-            <a:r>
-              <a:rPr lang="fr-CH" sz="3200" dirty="0" err="1"/>
-              <a:t>approach</a:t>
-            </a:r>
-            <a:r>
-              <a:rPr lang="fr-CH" sz="3200" dirty="0"/>
-              <a:t>: the </a:t>
-            </a:r>
-            <a:r>
-              <a:rPr lang="fr-CH" sz="3200" dirty="0" err="1"/>
-              <a:t>role</a:t>
-            </a:r>
-            <a:r>
-              <a:rPr lang="fr-CH" sz="3200" dirty="0"/>
-              <a:t> of </a:t>
-            </a:r>
-            <a:r>
-              <a:rPr lang="fr-CH" sz="3200" dirty="0" err="1"/>
-              <a:t>price</a:t>
-            </a:r>
-            <a:r>
-              <a:rPr lang="fr-CH" sz="3200" dirty="0"/>
-              <a:t> administration in </a:t>
-            </a:r>
-            <a:r>
-              <a:rPr lang="fr-CH" sz="3200" dirty="0" err="1"/>
-              <a:t>systemically</a:t>
-            </a:r>
-            <a:r>
-              <a:rPr lang="fr-CH" sz="3200" dirty="0"/>
-              <a:t> </a:t>
-            </a:r>
-            <a:r>
-              <a:rPr lang="fr-CH" sz="3200" dirty="0" err="1"/>
-              <a:t>significant</a:t>
-            </a:r>
-            <a:r>
-              <a:rPr lang="fr-CH" sz="3200" dirty="0"/>
-              <a:t> </a:t>
-            </a:r>
-            <a:r>
-              <a:rPr lang="fr-CH" sz="3200" dirty="0" err="1"/>
-              <a:t>sectors</a:t>
-            </a:r>
-            <a:endParaRPr lang="fr-CH" sz="3200" dirty="0"/>
+              <a:rPr lang="en-US" sz="3200" noProof="0" dirty="0"/>
+              <a:t>Our approach: the role of price administration in systemically significant sectors</a:t>
+            </a:r>
           </a:p>
         </p:txBody>
       </p:sp>
@@ -6558,28 +4693,8 @@
           <a:lstStyle/>
           <a:p>
             <a:r>
-              <a:rPr lang="fr-CH" dirty="0" err="1"/>
-              <a:t>Results</a:t>
-            </a:r>
-            <a:r>
-              <a:rPr lang="fr-CH" dirty="0"/>
-              <a:t> </a:t>
-            </a:r>
-            <a:r>
-              <a:rPr lang="fr-CH" dirty="0" err="1"/>
-              <a:t>from</a:t>
-            </a:r>
-            <a:r>
-              <a:rPr lang="fr-CH" dirty="0"/>
-              <a:t> a Leontief </a:t>
-            </a:r>
-            <a:r>
-              <a:rPr lang="fr-CH" dirty="0" err="1"/>
-              <a:t>price</a:t>
-            </a:r>
-            <a:r>
-              <a:rPr lang="fr-CH" dirty="0"/>
-              <a:t> model on Swiss input output table (2017)</a:t>
+              <a:rPr lang="en-US" noProof="0" dirty="0"/>
+              <a:t>Results from a Leontief price model on Swiss input output table (2017)</a:t>
             </a:r>
           </a:p>
         </p:txBody>
@@ -6643,50 +4758,18 @@
           <a:lstStyle/>
           <a:p>
             <a:r>
-              <a:rPr lang="fr-CH" sz="3200" dirty="0"/>
-              <a:t>Example: Food production, transformation and </a:t>
-            </a:r>
-            <a:r>
-              <a:rPr lang="fr-CH" sz="3200" dirty="0" err="1"/>
-              <a:t>retail</a:t>
-            </a:r>
-            <a:r>
-              <a:rPr lang="fr-CH" sz="3200" dirty="0"/>
-              <a:t> </a:t>
-            </a:r>
-            <a:r>
-              <a:rPr lang="fr-CH" sz="3200" dirty="0">
+              <a:rPr lang="en-US" sz="3200" noProof="0" dirty="0"/>
+              <a:t>Example: Food production, transformation and retail </a:t>
+            </a:r>
+            <a:r>
+              <a:rPr lang="en-US" sz="3200" noProof="0" dirty="0">
                 <a:sym typeface="Wingdings" panose="05000000000000000000" pitchFamily="2" charset="2"/>
               </a:rPr>
               <a:t> </a:t>
             </a:r>
             <a:r>
-              <a:rPr lang="fr-CH" sz="3200" dirty="0"/>
-              <a:t>interactions </a:t>
-            </a:r>
-            <a:r>
-              <a:rPr lang="fr-CH" sz="3200" dirty="0" err="1"/>
-              <a:t>between</a:t>
-            </a:r>
-            <a:r>
-              <a:rPr lang="fr-CH" sz="3200" dirty="0"/>
-              <a:t> </a:t>
-            </a:r>
-            <a:r>
-              <a:rPr lang="fr-CH" sz="3200" dirty="0" err="1"/>
-              <a:t>regulations</a:t>
-            </a:r>
-            <a:r>
-              <a:rPr lang="fr-CH" sz="3200" dirty="0"/>
-              <a:t> and </a:t>
-            </a:r>
-            <a:r>
-              <a:rPr lang="fr-CH" sz="3200" dirty="0" err="1"/>
-              <a:t>duopolistic</a:t>
-            </a:r>
-            <a:r>
-              <a:rPr lang="fr-CH" sz="3200" dirty="0"/>
-              <a:t> power</a:t>
+              <a:rPr lang="en-US" sz="3200" noProof="0" dirty="0"/>
+              <a:t>interactions between regulations and duopolistic power</a:t>
             </a:r>
           </a:p>
         </p:txBody>
@@ -6720,248 +4803,27 @@
           <a:lstStyle/>
           <a:p>
             <a:r>
-              <a:rPr lang="fr-CH" dirty="0"/>
-              <a:t>Swiss </a:t>
-            </a:r>
-            <a:r>
-              <a:rPr lang="fr-CH" dirty="0" err="1"/>
-              <a:t>food</a:t>
-            </a:r>
-            <a:r>
-              <a:rPr lang="fr-CH" dirty="0"/>
-              <a:t> </a:t>
-            </a:r>
-            <a:r>
-              <a:rPr lang="fr-CH" dirty="0" err="1"/>
-              <a:t>prices</a:t>
-            </a:r>
-            <a:r>
-              <a:rPr lang="fr-CH" dirty="0"/>
-              <a:t> are </a:t>
-            </a:r>
-            <a:r>
-              <a:rPr lang="fr-CH" dirty="0" err="1"/>
-              <a:t>particularily</a:t>
-            </a:r>
-            <a:r>
-              <a:rPr lang="fr-CH" dirty="0"/>
-              <a:t> </a:t>
-            </a:r>
-            <a:r>
-              <a:rPr lang="fr-CH" dirty="0" err="1"/>
-              <a:t>resistant</a:t>
-            </a:r>
-            <a:r>
-              <a:rPr lang="fr-CH" dirty="0"/>
-              <a:t> to international </a:t>
-            </a:r>
-            <a:r>
-              <a:rPr lang="fr-CH" dirty="0" err="1"/>
-              <a:t>shocks</a:t>
-            </a:r>
-            <a:endParaRPr lang="fr-CH" dirty="0"/>
-          </a:p>
-          <a:p>
-            <a:r>
-              <a:rPr lang="fr-CH" dirty="0"/>
-              <a:t>This </a:t>
-            </a:r>
-            <a:r>
-              <a:rPr lang="fr-CH" dirty="0" err="1"/>
-              <a:t>is</a:t>
-            </a:r>
-            <a:r>
-              <a:rPr lang="fr-CH" dirty="0"/>
-              <a:t> </a:t>
-            </a:r>
-            <a:r>
-              <a:rPr lang="fr-CH" dirty="0" err="1"/>
-              <a:t>mainly</a:t>
-            </a:r>
-            <a:r>
-              <a:rPr lang="fr-CH" dirty="0"/>
-              <a:t> due to the </a:t>
-            </a:r>
-            <a:r>
-              <a:rPr lang="fr-CH" dirty="0" err="1"/>
-              <a:t>fact</a:t>
-            </a:r>
-            <a:r>
-              <a:rPr lang="fr-CH" dirty="0"/>
-              <a:t> </a:t>
-            </a:r>
-            <a:r>
-              <a:rPr lang="fr-CH" dirty="0" err="1"/>
-              <a:t>that</a:t>
-            </a:r>
-            <a:r>
-              <a:rPr lang="fr-CH" dirty="0"/>
-              <a:t> </a:t>
-            </a:r>
-            <a:r>
-              <a:rPr lang="fr-CH" dirty="0" err="1"/>
-              <a:t>food</a:t>
-            </a:r>
-            <a:r>
-              <a:rPr lang="fr-CH" dirty="0"/>
-              <a:t> </a:t>
-            </a:r>
-            <a:r>
-              <a:rPr lang="fr-CH" dirty="0" err="1"/>
-              <a:t>prices</a:t>
-            </a:r>
-            <a:r>
-              <a:rPr lang="fr-CH" dirty="0"/>
-              <a:t> are </a:t>
-            </a:r>
-            <a:r>
-              <a:rPr lang="fr-CH" dirty="0" err="1"/>
-              <a:t>largely</a:t>
-            </a:r>
-            <a:r>
-              <a:rPr lang="fr-CH" dirty="0"/>
-              <a:t> </a:t>
-            </a:r>
-            <a:r>
-              <a:rPr lang="fr-CH" dirty="0" err="1"/>
-              <a:t>sheltered</a:t>
-            </a:r>
-            <a:r>
-              <a:rPr lang="fr-CH" dirty="0"/>
-              <a:t> </a:t>
-            </a:r>
-            <a:r>
-              <a:rPr lang="fr-CH" dirty="0" err="1"/>
-              <a:t>from</a:t>
-            </a:r>
-            <a:r>
-              <a:rPr lang="fr-CH" dirty="0"/>
-              <a:t> international fluctuations </a:t>
-            </a:r>
-            <a:r>
-              <a:rPr lang="fr-CH" dirty="0" err="1"/>
-              <a:t>through</a:t>
-            </a:r>
-            <a:r>
-              <a:rPr lang="fr-CH" dirty="0"/>
-              <a:t> indirect </a:t>
-            </a:r>
-            <a:r>
-              <a:rPr lang="fr-CH" dirty="0" err="1"/>
-              <a:t>price</a:t>
-            </a:r>
-            <a:r>
-              <a:rPr lang="fr-CH" dirty="0"/>
-              <a:t> control</a:t>
+              <a:rPr lang="en-US" noProof="0" dirty="0"/>
+              <a:t>Swiss food prices are particularly resistant to international shocks</a:t>
+            </a:r>
+          </a:p>
+          <a:p>
+            <a:r>
+              <a:rPr lang="en-US" noProof="0" dirty="0"/>
+              <a:t>This is mainly due to the fact that Swiss food prices are largely sheltered from international fluctuations through indirect price control</a:t>
             </a:r>
           </a:p>
           <a:p>
             <a:pPr lvl="1"/>
             <a:r>
-              <a:rPr lang="fr-CH" dirty="0"/>
-              <a:t>Protection of the agricultural </a:t>
-            </a:r>
-            <a:r>
-              <a:rPr lang="fr-CH" dirty="0" err="1"/>
-              <a:t>sector</a:t>
-            </a:r>
-            <a:r>
-              <a:rPr lang="fr-CH" dirty="0"/>
-              <a:t> </a:t>
-            </a:r>
-            <a:r>
-              <a:rPr lang="fr-CH" dirty="0" err="1"/>
-              <a:t>through</a:t>
-            </a:r>
-            <a:r>
-              <a:rPr lang="fr-CH" dirty="0"/>
-              <a:t> import </a:t>
-            </a:r>
-            <a:r>
-              <a:rPr lang="fr-CH" dirty="0" err="1"/>
-              <a:t>tariff</a:t>
-            </a:r>
-            <a:r>
-              <a:rPr lang="fr-CH" dirty="0"/>
-              <a:t> rates quotas and subsidies</a:t>
-            </a:r>
-          </a:p>
-          <a:p>
-            <a:r>
-              <a:rPr lang="fr-CH" dirty="0"/>
-              <a:t>Food transformation and </a:t>
-            </a:r>
-            <a:r>
-              <a:rPr lang="fr-CH" dirty="0" err="1"/>
-              <a:t>retail</a:t>
-            </a:r>
-            <a:r>
-              <a:rPr lang="fr-CH" dirty="0"/>
-              <a:t> are </a:t>
-            </a:r>
-            <a:r>
-              <a:rPr lang="fr-CH" dirty="0" err="1"/>
-              <a:t>furthermore</a:t>
-            </a:r>
-            <a:r>
-              <a:rPr lang="fr-CH" dirty="0"/>
-              <a:t> </a:t>
-            </a:r>
-            <a:r>
-              <a:rPr lang="fr-CH" dirty="0" err="1"/>
-              <a:t>controlled</a:t>
-            </a:r>
-            <a:r>
-              <a:rPr lang="fr-CH" dirty="0"/>
-              <a:t> by </a:t>
-            </a:r>
-            <a:r>
-              <a:rPr lang="fr-CH" dirty="0" err="1"/>
-              <a:t>two</a:t>
-            </a:r>
-            <a:r>
-              <a:rPr lang="fr-CH" dirty="0"/>
-              <a:t> large </a:t>
-            </a:r>
-            <a:r>
-              <a:rPr lang="fr-CH" dirty="0" err="1"/>
-              <a:t>cooperatives</a:t>
-            </a:r>
-            <a:r>
-              <a:rPr lang="fr-CH" dirty="0"/>
-              <a:t> (Coop &amp; Migros), </a:t>
-            </a:r>
-            <a:r>
-              <a:rPr lang="fr-CH" dirty="0" err="1"/>
-              <a:t>whose</a:t>
-            </a:r>
-            <a:r>
-              <a:rPr lang="fr-CH" dirty="0"/>
-              <a:t> power come </a:t>
-            </a:r>
-            <a:r>
-              <a:rPr lang="fr-CH" dirty="0" err="1"/>
-              <a:t>from</a:t>
-            </a:r>
-            <a:r>
-              <a:rPr lang="fr-CH" dirty="0"/>
-              <a:t> the tradition of protection of the Swiss </a:t>
-            </a:r>
-            <a:r>
-              <a:rPr lang="fr-CH" dirty="0" err="1"/>
-              <a:t>domestic</a:t>
-            </a:r>
-            <a:r>
-              <a:rPr lang="fr-CH" dirty="0"/>
-              <a:t> </a:t>
-            </a:r>
-            <a:r>
-              <a:rPr lang="fr-CH" dirty="0" err="1"/>
-              <a:t>sector</a:t>
-            </a:r>
-            <a:r>
-              <a:rPr lang="fr-CH" dirty="0"/>
-              <a:t> by the state</a:t>
+              <a:rPr lang="en-US" noProof="0" dirty="0"/>
+              <a:t>Protection of the agricultural sector through import tariff rates quotas and subsidies</a:t>
+            </a:r>
+          </a:p>
+          <a:p>
+            <a:r>
+              <a:rPr lang="en-US" noProof="0" dirty="0"/>
+              <a:t>Food transformation and retail are furthermore controlled by two large cooperatives (Coop &amp; Migros), whose power come from the tradition of protection of the Swiss domestic sector by the state</a:t>
             </a:r>
           </a:p>
         </p:txBody>
@@ -6988,7 +4850,7 @@
         </p:blipFill>
         <p:spPr>
           <a:xfrm>
-            <a:off x="6096000" y="1247775"/>
+            <a:off x="6160008" y="1531787"/>
             <a:ext cx="5416679" cy="5154762"/>
           </a:xfrm>
           <a:prstGeom prst="rect">
@@ -7055,22 +4917,9 @@
           <a:lstStyle/>
           <a:p>
             <a:r>
-              <a:rPr lang="fr-CH" sz="4000" dirty="0"/>
-              <a:t>Example 2: </a:t>
-            </a:r>
-            <a:r>
-              <a:rPr lang="fr-CH" sz="4000" dirty="0" err="1"/>
-              <a:t>energy</a:t>
-            </a:r>
-            <a:r>
-              <a:rPr lang="fr-CH" sz="4000" dirty="0"/>
-              <a:t> and </a:t>
-            </a:r>
-            <a:r>
-              <a:rPr lang="fr-CH" sz="4000" dirty="0" err="1"/>
-              <a:t>electricity</a:t>
-            </a:r>
-            <a:endParaRPr lang="fr-CH" sz="4000" dirty="0"/>
+              <a:rPr lang="en-US" sz="4000" noProof="0" dirty="0"/>
+              <a:t>Example 2: energy and electricity</a:t>
+            </a:r>
           </a:p>
         </p:txBody>
       </p:sp>
@@ -7098,7 +4947,7 @@
         </p:spPr>
         <p:txBody>
           <a:bodyPr>
-            <a:normAutofit fontScale="85000" lnSpcReduction="20000"/>
+            <a:normAutofit fontScale="85000" lnSpcReduction="10000"/>
           </a:bodyPr>
           <a:lstStyle/>
           <a:p>
@@ -7106,180 +4955,8 @@
               <a:buNone/>
             </a:pPr>
             <a:r>
-              <a:rPr lang="fr-CH" dirty="0" err="1"/>
-              <a:t>Switzerland</a:t>
-            </a:r>
-            <a:r>
-              <a:rPr lang="fr-CH" dirty="0"/>
-              <a:t> </a:t>
-            </a:r>
-            <a:r>
-              <a:rPr lang="fr-CH" dirty="0" err="1"/>
-              <a:t>resistance</a:t>
-            </a:r>
-            <a:r>
-              <a:rPr lang="fr-CH" dirty="0"/>
-              <a:t> to international </a:t>
-            </a:r>
-            <a:r>
-              <a:rPr lang="fr-CH" dirty="0" err="1"/>
-              <a:t>energy</a:t>
-            </a:r>
-            <a:r>
-              <a:rPr lang="fr-CH" dirty="0"/>
-              <a:t> </a:t>
-            </a:r>
-            <a:r>
-              <a:rPr lang="fr-CH" dirty="0" err="1"/>
-              <a:t>shocks</a:t>
-            </a:r>
-            <a:r>
-              <a:rPr lang="fr-CH" dirty="0"/>
-              <a:t> </a:t>
-            </a:r>
-            <a:r>
-              <a:rPr lang="fr-CH" dirty="0" err="1"/>
-              <a:t>also</a:t>
-            </a:r>
-            <a:r>
-              <a:rPr lang="fr-CH" dirty="0"/>
-              <a:t> come </a:t>
-            </a:r>
-            <a:r>
-              <a:rPr lang="fr-CH" dirty="0" err="1"/>
-              <a:t>from</a:t>
-            </a:r>
-            <a:r>
-              <a:rPr lang="fr-CH" dirty="0"/>
-              <a:t> the combination and </a:t>
-            </a:r>
-            <a:r>
-              <a:rPr lang="fr-CH" dirty="0" err="1"/>
-              <a:t>complementarity</a:t>
-            </a:r>
-            <a:r>
-              <a:rPr lang="fr-CH" dirty="0"/>
-              <a:t> </a:t>
-            </a:r>
-            <a:r>
-              <a:rPr lang="fr-CH" dirty="0" err="1"/>
-              <a:t>between</a:t>
-            </a:r>
-            <a:r>
-              <a:rPr lang="fr-CH" dirty="0"/>
-              <a:t> a </a:t>
-            </a:r>
-            <a:r>
-              <a:rPr lang="fr-CH" dirty="0" err="1"/>
-              <a:t>well-diversified</a:t>
-            </a:r>
-            <a:r>
-              <a:rPr lang="fr-CH" dirty="0"/>
-              <a:t> </a:t>
-            </a:r>
-            <a:r>
-              <a:rPr lang="fr-CH" dirty="0" err="1"/>
-              <a:t>energy</a:t>
-            </a:r>
-            <a:r>
-              <a:rPr lang="fr-CH" dirty="0"/>
-              <a:t> mix, </a:t>
-            </a:r>
-            <a:r>
-              <a:rPr lang="fr-CH" dirty="0" err="1"/>
-              <a:t>low</a:t>
-            </a:r>
-            <a:r>
-              <a:rPr lang="fr-CH" dirty="0"/>
-              <a:t> </a:t>
-            </a:r>
-            <a:r>
-              <a:rPr lang="fr-CH" dirty="0" err="1"/>
-              <a:t>energy</a:t>
-            </a:r>
-            <a:r>
-              <a:rPr lang="fr-CH" dirty="0"/>
-              <a:t> </a:t>
-            </a:r>
-            <a:r>
-              <a:rPr lang="fr-CH" dirty="0" err="1"/>
-              <a:t>intensity</a:t>
-            </a:r>
-            <a:r>
-              <a:rPr lang="fr-CH" dirty="0"/>
-              <a:t> and the </a:t>
-            </a:r>
-            <a:r>
-              <a:rPr lang="fr-CH" dirty="0" err="1"/>
-              <a:t>fact</a:t>
-            </a:r>
-            <a:r>
-              <a:rPr lang="fr-CH" dirty="0"/>
-              <a:t> </a:t>
-            </a:r>
-            <a:r>
-              <a:rPr lang="fr-CH" dirty="0" err="1"/>
-              <a:t>that</a:t>
-            </a:r>
-            <a:r>
-              <a:rPr lang="fr-CH" dirty="0"/>
-              <a:t> </a:t>
-            </a:r>
-            <a:r>
-              <a:rPr lang="fr-CH" dirty="0" err="1"/>
-              <a:t>electricity</a:t>
-            </a:r>
-            <a:r>
-              <a:rPr lang="fr-CH" dirty="0"/>
-              <a:t> </a:t>
-            </a:r>
-            <a:r>
-              <a:rPr lang="fr-CH" dirty="0" err="1"/>
-              <a:t>supply</a:t>
-            </a:r>
-            <a:r>
-              <a:rPr lang="fr-CH" dirty="0"/>
-              <a:t> </a:t>
-            </a:r>
-            <a:r>
-              <a:rPr lang="fr-CH" dirty="0" err="1"/>
-              <a:t>is</a:t>
-            </a:r>
-            <a:r>
-              <a:rPr lang="fr-CH" dirty="0"/>
-              <a:t> not </a:t>
-            </a:r>
-            <a:r>
-              <a:rPr lang="fr-CH" dirty="0" err="1"/>
-              <a:t>governed</a:t>
-            </a:r>
-            <a:r>
-              <a:rPr lang="fr-CH" dirty="0"/>
-              <a:t> by a </a:t>
-            </a:r>
-            <a:r>
-              <a:rPr lang="fr-CH" dirty="0" err="1"/>
-              <a:t>liberalized</a:t>
-            </a:r>
-            <a:r>
-              <a:rPr lang="fr-CH" dirty="0"/>
-              <a:t> </a:t>
-            </a:r>
-            <a:r>
-              <a:rPr lang="fr-CH" dirty="0" err="1"/>
-              <a:t>market</a:t>
-            </a:r>
-            <a:r>
-              <a:rPr lang="fr-CH" dirty="0"/>
-              <a:t> as in the </a:t>
-            </a:r>
-            <a:r>
-              <a:rPr lang="fr-CH" dirty="0" err="1"/>
-              <a:t>rest</a:t>
-            </a:r>
-            <a:r>
-              <a:rPr lang="fr-CH" dirty="0"/>
-              <a:t> of Europe</a:t>
+              <a:rPr lang="en-US" noProof="0" dirty="0"/>
+              <a:t>Switzerland resistance to international energy shocks also come from the combination and complementarity between a well-diversified energy mix, low energy intensity and the fact that electricity supply is not governed by a liberalized market as in the rest of Europe</a:t>
             </a:r>
           </a:p>
         </p:txBody>
@@ -7398,110 +5075,16 @@
         <a:srgbClr val="96607D"/>
       </a:folHlink>
     </a:clrScheme>
-    <a:fontScheme name="Office">
+    <a:fontScheme name="Personnalisé 1">
       <a:majorFont>
-        <a:latin typeface="Aptos Display" panose="02110004020202020204"/>
+        <a:latin typeface="Garamond"/>
         <a:ea typeface=""/>
         <a:cs typeface=""/>
-        <a:font script="Jpan" typeface="游ゴシック Light"/>
-        <a:font script="Hang" typeface="맑은 고딕"/>
-        <a:font script="Hans" typeface="等线 Light"/>
-        <a:font script="Hant" typeface="新細明體"/>
-        <a:font script="Arab" typeface="Times New Roman"/>
-        <a:font script="Hebr" typeface="Times New Roman"/>
-        <a:font script="Thai" typeface="Angsana New"/>
-        <a:font script="Ethi" typeface="Nyala"/>
-        <a:font script="Beng" typeface="Vrinda"/>
-        <a:font script="Gujr" typeface="Shruti"/>
-        <a:font script="Khmr" typeface="MoolBoran"/>
-        <a:font script="Knda" typeface="Tunga"/>
-        <a:font script="Guru" typeface="Raavi"/>
-        <a:font script="Cans" typeface="Euphemia"/>
-        <a:font script="Cher" typeface="Plantagenet Cherokee"/>
-        <a:font script="Yiii" typeface="Microsoft Yi Baiti"/>
-        <a:font script="Tibt" typeface="Microsoft Himalaya"/>
-        <a:font script="Thaa" typeface="MV Boli"/>
-        <a:font script="Deva" typeface="Mangal"/>
-        <a:font script="Telu" typeface="Gautami"/>
-        <a:font script="Taml" typeface="Latha"/>
-        <a:font script="Syrc" typeface="Estrangelo Edessa"/>
-        <a:font script="Orya" typeface="Kalinga"/>
-        <a:font script="Mlym" typeface="Kartika"/>
-        <a:font script="Laoo" typeface="DokChampa"/>
-        <a:font script="Sinh" typeface="Iskoola Pota"/>
-        <a:font script="Mong" typeface="Mongolian Baiti"/>
-        <a:font script="Viet" typeface="Times New Roman"/>
-        <a:font script="Uigh" typeface="Microsoft Uighur"/>
-        <a:font script="Geor" typeface="Sylfaen"/>
-        <a:font script="Armn" typeface="Arial"/>
-        <a:font script="Bugi" typeface="Leelawadee UI"/>
-        <a:font script="Bopo" typeface="Microsoft JhengHei"/>
-        <a:font script="Java" typeface="Javanese Text"/>
-        <a:font script="Lisu" typeface="Segoe UI"/>
-        <a:font script="Mymr" typeface="Myanmar Text"/>
-        <a:font script="Nkoo" typeface="Ebrima"/>
-        <a:font script="Olck" typeface="Nirmala UI"/>
-        <a:font script="Osma" typeface="Ebrima"/>
-        <a:font script="Phag" typeface="Phagspa"/>
-        <a:font script="Syrn" typeface="Estrangelo Edessa"/>
-        <a:font script="Syrj" typeface="Estrangelo Edessa"/>
-        <a:font script="Syre" typeface="Estrangelo Edessa"/>
-        <a:font script="Sora" typeface="Nirmala UI"/>
-        <a:font script="Tale" typeface="Microsoft Tai Le"/>
-        <a:font script="Talu" typeface="Microsoft New Tai Lue"/>
-        <a:font script="Tfng" typeface="Ebrima"/>
       </a:majorFont>
       <a:minorFont>
-        <a:latin typeface="Aptos" panose="02110004020202020204"/>
+        <a:latin typeface="Garamond"/>
         <a:ea typeface=""/>
         <a:cs typeface=""/>
-        <a:font script="Jpan" typeface="游ゴシック"/>
-        <a:font script="Hang" typeface="맑은 고딕"/>
-        <a:font script="Hans" typeface="等线"/>
-        <a:font script="Hant" typeface="新細明體"/>
-        <a:font script="Arab" typeface="Arial"/>
-        <a:font script="Hebr" typeface="Arial"/>
-        <a:font script="Thai" typeface="Cordia New"/>
-        <a:font script="Ethi" typeface="Nyala"/>
-        <a:font script="Beng" typeface="Vrinda"/>
-        <a:font script="Gujr" typeface="Shruti"/>
-        <a:font script="Khmr" typeface="DaunPenh"/>
-        <a:font script="Knda" typeface="Tunga"/>
-        <a:font script="Guru" typeface="Raavi"/>
-        <a:font script="Cans" typeface="Euphemia"/>
-        <a:font script="Cher" typeface="Plantagenet Cherokee"/>
-        <a:font script="Yiii" typeface="Microsoft Yi Baiti"/>
-        <a:font script="Tibt" typeface="Microsoft Himalaya"/>
-        <a:font script="Thaa" typeface="MV Boli"/>
-        <a:font script="Deva" typeface="Mangal"/>
-        <a:font script="Telu" typeface="Gautami"/>
-        <a:font script="Taml" typeface="Latha"/>
-        <a:font script="Syrc" typeface="Estrangelo Edessa"/>
-        <a:font script="Orya" typeface="Kalinga"/>
-        <a:font script="Mlym" typeface="Kartika"/>
-        <a:font script="Laoo" typeface="DokChampa"/>
-        <a:font script="Sinh" typeface="Iskoola Pota"/>
-        <a:font script="Mong" typeface="Mongolian Baiti"/>
-        <a:font script="Viet" typeface="Arial"/>
-        <a:font script="Uigh" typeface="Microsoft Uighur"/>
-        <a:font script="Geor" typeface="Sylfaen"/>
-        <a:font script="Armn" typeface="Arial"/>
-        <a:font script="Bugi" typeface="Leelawadee UI"/>
-        <a:font script="Bopo" typeface="Microsoft JhengHei"/>
-        <a:font script="Java" typeface="Javanese Text"/>
-        <a:font script="Lisu" typeface="Segoe UI"/>
-        <a:font script="Mymr" typeface="Myanmar Text"/>
-        <a:font script="Nkoo" typeface="Ebrima"/>
-        <a:font script="Olck" typeface="Nirmala UI"/>
-        <a:font script="Osma" typeface="Ebrima"/>
-        <a:font script="Phag" typeface="Phagspa"/>
-        <a:font script="Syrn" typeface="Estrangelo Edessa"/>
-        <a:font script="Syrj" typeface="Estrangelo Edessa"/>
-        <a:font script="Syre" typeface="Estrangelo Edessa"/>
-        <a:font script="Sora" typeface="Nirmala UI"/>
-        <a:font script="Tale" typeface="Microsoft Tai Le"/>
-        <a:font script="Talu" typeface="Microsoft New Tai Lue"/>
-        <a:font script="Tfng" typeface="Ebrima"/>
       </a:minorFont>
     </a:fontScheme>
     <a:fmtScheme name="Office">
